--- a/public/fun/pack/pptx/wedding/결혼식_38_식순중심_군고구마골목.pptx
+++ b/public/fun/pack/pptx/wedding/결혼식_38_식순중심_군고구마골목.pptx
@@ -3286,14 +3286,6 @@
 <file path=ppt/slides/slide1.xml><?xml version="1.0" encoding="utf-8"?>
 <p:sld xmlns:a="http://schemas.openxmlformats.org/drawingml/2006/main" xmlns:p="http://schemas.openxmlformats.org/presentationml/2006/main" xmlns:r="http://schemas.openxmlformats.org/officeDocument/2006/relationships">
   <p:cSld>
-    <p:bg>
-      <p:bgPr>
-        <a:solidFill>
-          <a:srgbClr val="FBF3EF"/>
-        </a:solidFill>
-        <a:effectLst/>
-      </p:bgPr>
-    </p:bg>
     <p:spTree>
       <p:nvGrpSpPr>
         <p:cNvPr id="1" name=""/>
@@ -3301,383 +3293,30 @@
         <p:nvPr/>
       </p:nvGrpSpPr>
       <p:grpSpPr/>
-      <p:sp>
-        <p:nvSpPr>
-          <p:cNvPr id="3" name="장식"/>
-          <p:cNvSpPr/>
+      <p:pic>
+        <p:nvPicPr>
+          <p:cNvPr id="3" name="표지 그림" descr="wedding-38.jpg"/>
+          <p:cNvPicPr>
+            <a:picLocks noChangeAspect="1"/>
+          </p:cNvPicPr>
           <p:nvPr/>
-        </p:nvSpPr>
-        <p:spPr>
-          <a:xfrm>
-            <a:off x="274320" y="274320"/>
-            <a:ext cx="11643055" cy="6309360"/>
+        </p:nvPicPr>
+        <p:blipFill>
+          <a:blip r:embed="rId2"/>
+          <a:stretch>
+            <a:fillRect/>
+          </a:stretch>
+        </p:blipFill>
+        <p:spPr>
+          <a:xfrm>
+            <a:off x="0" y="0"/>
+            <a:ext cx="12191695" cy="6858000"/>
           </a:xfrm>
           <a:prstGeom prst="rect">
             <a:avLst/>
           </a:prstGeom>
-          <a:noFill/>
-          <a:ln w="38100">
-            <a:solidFill>
-              <a:srgbClr val="995229"/>
-            </a:solidFill>
-          </a:ln>
-        </p:spPr>
-        <p:txBody>
-          <a:bodyPr rtlCol="0" anchor="ctr"/>
-          <a:lstStyle/>
-          <a:p>
-            <a:pPr algn="ctr"/>
-          </a:p>
-        </p:txBody>
-      </p:sp>
-      <p:sp>
-        <p:nvSpPr>
-          <p:cNvPr id="4" name="장식"/>
-          <p:cNvSpPr/>
-          <p:nvPr/>
-        </p:nvSpPr>
-        <p:spPr>
-          <a:xfrm>
-            <a:off x="457200" y="457200"/>
-            <a:ext cx="11277295" cy="5943600"/>
-          </a:xfrm>
-          <a:prstGeom prst="rect">
-            <a:avLst/>
-          </a:prstGeom>
-          <a:noFill/>
-          <a:ln w="12700">
-            <a:solidFill>
-              <a:srgbClr val="F4DBCD"/>
-            </a:solidFill>
-          </a:ln>
-        </p:spPr>
-        <p:txBody>
-          <a:bodyPr rtlCol="0" anchor="ctr"/>
-          <a:lstStyle/>
-          <a:p>
-            <a:pPr algn="ctr"/>
-          </a:p>
-        </p:txBody>
-      </p:sp>
-      <p:sp>
-        <p:nvSpPr>
-          <p:cNvPr id="5" name="장식"/>
-          <p:cNvSpPr/>
-          <p:nvPr/>
-        </p:nvSpPr>
-        <p:spPr>
-          <a:xfrm>
-            <a:off x="5854364" y="780551"/>
-            <a:ext cx="333470" cy="333470"/>
-          </a:xfrm>
-          <a:prstGeom prst="ellipse">
-            <a:avLst/>
-          </a:prstGeom>
-          <a:solidFill>
-            <a:srgbClr val="995229"/>
-          </a:solidFill>
-          <a:ln>
-            <a:noFill/>
-          </a:ln>
-        </p:spPr>
-        <p:txBody>
-          <a:bodyPr rtlCol="0" anchor="ctr"/>
-          <a:lstStyle/>
-          <a:p>
-            <a:pPr algn="ctr"/>
-          </a:p>
-        </p:txBody>
-      </p:sp>
-      <p:sp>
-        <p:nvSpPr>
-          <p:cNvPr id="6" name="장식"/>
-          <p:cNvSpPr/>
-          <p:nvPr/>
-        </p:nvSpPr>
-        <p:spPr>
-          <a:xfrm>
-            <a:off x="6892061" y="1623191"/>
-            <a:ext cx="200163" cy="200163"/>
-          </a:xfrm>
-          <a:prstGeom prst="ellipse">
-            <a:avLst/>
-          </a:prstGeom>
-          <a:solidFill>
-            <a:srgbClr val="F4DBCD"/>
-          </a:solidFill>
-          <a:ln>
-            <a:noFill/>
-          </a:ln>
-        </p:spPr>
-        <p:txBody>
-          <a:bodyPr rtlCol="0" anchor="ctr"/>
-          <a:lstStyle/>
-          <a:p>
-            <a:pPr algn="ctr"/>
-          </a:p>
-        </p:txBody>
-      </p:sp>
-      <p:sp>
-        <p:nvSpPr>
-          <p:cNvPr id="7" name="장식"/>
-          <p:cNvSpPr/>
-          <p:nvPr/>
-        </p:nvSpPr>
-        <p:spPr>
-          <a:xfrm>
-            <a:off x="5120089" y="1161505"/>
-            <a:ext cx="263527" cy="263527"/>
-          </a:xfrm>
-          <a:prstGeom prst="ellipse">
-            <a:avLst/>
-          </a:prstGeom>
-          <a:solidFill>
-            <a:srgbClr val="3B9185"/>
-          </a:solidFill>
-          <a:ln>
-            <a:noFill/>
-          </a:ln>
-        </p:spPr>
-        <p:txBody>
-          <a:bodyPr rtlCol="0" anchor="ctr"/>
-          <a:lstStyle/>
-          <a:p>
-            <a:pPr algn="ctr"/>
-          </a:p>
-        </p:txBody>
-      </p:sp>
-      <p:sp>
-        <p:nvSpPr>
-          <p:cNvPr id="8" name="장식"/>
-          <p:cNvSpPr/>
-          <p:nvPr/>
-        </p:nvSpPr>
-        <p:spPr>
-          <a:xfrm>
-            <a:off x="6364859" y="758859"/>
-            <a:ext cx="216496" cy="216496"/>
-          </a:xfrm>
-          <a:prstGeom prst="ellipse">
-            <a:avLst/>
-          </a:prstGeom>
-          <a:solidFill>
-            <a:srgbClr val="995229"/>
-          </a:solidFill>
-          <a:ln>
-            <a:noFill/>
-          </a:ln>
-        </p:spPr>
-        <p:txBody>
-          <a:bodyPr rtlCol="0" anchor="ctr"/>
-          <a:lstStyle/>
-          <a:p>
-            <a:pPr algn="ctr"/>
-          </a:p>
-        </p:txBody>
-      </p:sp>
-      <p:sp>
-        <p:nvSpPr>
-          <p:cNvPr id="9" name="장식"/>
-          <p:cNvSpPr/>
-          <p:nvPr/>
-        </p:nvSpPr>
-        <p:spPr>
-          <a:xfrm>
-            <a:off x="6068545" y="360190"/>
-            <a:ext cx="334832" cy="334832"/>
-          </a:xfrm>
-          <a:prstGeom prst="ellipse">
-            <a:avLst/>
-          </a:prstGeom>
-          <a:solidFill>
-            <a:srgbClr val="F4DBCD"/>
-          </a:solidFill>
-          <a:ln>
-            <a:noFill/>
-          </a:ln>
-        </p:spPr>
-        <p:txBody>
-          <a:bodyPr rtlCol="0" anchor="ctr"/>
-          <a:lstStyle/>
-          <a:p>
-            <a:pPr algn="ctr"/>
-          </a:p>
-        </p:txBody>
-      </p:sp>
-      <p:sp>
-        <p:nvSpPr>
-          <p:cNvPr id="10" name="장식"/>
-          <p:cNvSpPr/>
-          <p:nvPr/>
-        </p:nvSpPr>
-        <p:spPr>
-          <a:xfrm>
-            <a:off x="5437401" y="825259"/>
-            <a:ext cx="143688" cy="143688"/>
-          </a:xfrm>
-          <a:prstGeom prst="ellipse">
-            <a:avLst/>
-          </a:prstGeom>
-          <a:solidFill>
-            <a:srgbClr val="3B9185"/>
-          </a:solidFill>
-          <a:ln>
-            <a:noFill/>
-          </a:ln>
-        </p:spPr>
-        <p:txBody>
-          <a:bodyPr rtlCol="0" anchor="ctr"/>
-          <a:lstStyle/>
-          <a:p>
-            <a:pPr algn="ctr"/>
-          </a:p>
-        </p:txBody>
-      </p:sp>
-      <p:sp>
-        <p:nvSpPr>
-          <p:cNvPr id="11" name="장식"/>
-          <p:cNvSpPr/>
-          <p:nvPr/>
-        </p:nvSpPr>
-        <p:spPr>
-          <a:xfrm>
-            <a:off x="6550618" y="2104327"/>
-            <a:ext cx="285402" cy="285402"/>
-          </a:xfrm>
-          <a:prstGeom prst="ellipse">
-            <a:avLst/>
-          </a:prstGeom>
-          <a:solidFill>
-            <a:srgbClr val="995229"/>
-          </a:solidFill>
-          <a:ln>
-            <a:noFill/>
-          </a:ln>
-        </p:spPr>
-        <p:txBody>
-          <a:bodyPr rtlCol="0" anchor="ctr"/>
-          <a:lstStyle/>
-          <a:p>
-            <a:pPr algn="ctr"/>
-          </a:p>
-        </p:txBody>
-      </p:sp>
-      <p:sp>
-        <p:nvSpPr>
-          <p:cNvPr id="12" name="장식"/>
-          <p:cNvSpPr/>
-          <p:nvPr/>
-        </p:nvSpPr>
-        <p:spPr>
-          <a:xfrm>
-            <a:off x="6115670" y="917740"/>
-            <a:ext cx="267797" cy="267797"/>
-          </a:xfrm>
-          <a:prstGeom prst="ellipse">
-            <a:avLst/>
-          </a:prstGeom>
-          <a:solidFill>
-            <a:srgbClr val="F4DBCD"/>
-          </a:solidFill>
-          <a:ln>
-            <a:noFill/>
-          </a:ln>
-        </p:spPr>
-        <p:txBody>
-          <a:bodyPr rtlCol="0" anchor="ctr"/>
-          <a:lstStyle/>
-          <a:p>
-            <a:pPr algn="ctr"/>
-          </a:p>
-        </p:txBody>
-      </p:sp>
-      <p:sp>
-        <p:nvSpPr>
-          <p:cNvPr id="13" name="장식"/>
-          <p:cNvSpPr/>
-          <p:nvPr/>
-        </p:nvSpPr>
-        <p:spPr>
-          <a:xfrm>
-            <a:off x="6642241" y="1444838"/>
-            <a:ext cx="284342" cy="284342"/>
-          </a:xfrm>
-          <a:prstGeom prst="ellipse">
-            <a:avLst/>
-          </a:prstGeom>
-          <a:solidFill>
-            <a:srgbClr val="3B9185"/>
-          </a:solidFill>
-          <a:ln>
-            <a:noFill/>
-          </a:ln>
-        </p:spPr>
-        <p:txBody>
-          <a:bodyPr rtlCol="0" anchor="ctr"/>
-          <a:lstStyle/>
-          <a:p>
-            <a:pPr algn="ctr"/>
-          </a:p>
-        </p:txBody>
-      </p:sp>
-      <p:sp>
-        <p:nvSpPr>
-          <p:cNvPr id="14" name="장식"/>
-          <p:cNvSpPr/>
-          <p:nvPr/>
-        </p:nvSpPr>
-        <p:spPr>
-          <a:xfrm>
-            <a:off x="5561757" y="750724"/>
-            <a:ext cx="180660" cy="180660"/>
-          </a:xfrm>
-          <a:prstGeom prst="ellipse">
-            <a:avLst/>
-          </a:prstGeom>
-          <a:solidFill>
-            <a:srgbClr val="995229"/>
-          </a:solidFill>
-          <a:ln>
-            <a:noFill/>
-          </a:ln>
-        </p:spPr>
-        <p:txBody>
-          <a:bodyPr rtlCol="0" anchor="ctr"/>
-          <a:lstStyle/>
-          <a:p>
-            <a:pPr algn="ctr"/>
-          </a:p>
-        </p:txBody>
-      </p:sp>
-      <p:sp>
-        <p:nvSpPr>
-          <p:cNvPr id="15" name="장식"/>
-          <p:cNvSpPr/>
-          <p:nvPr/>
-        </p:nvSpPr>
-        <p:spPr>
-          <a:xfrm>
-            <a:off x="5279103" y="941758"/>
-            <a:ext cx="124614" cy="124614"/>
-          </a:xfrm>
-          <a:prstGeom prst="ellipse">
-            <a:avLst/>
-          </a:prstGeom>
-          <a:solidFill>
-            <a:srgbClr val="F4DBCD"/>
-          </a:solidFill>
-          <a:ln>
-            <a:noFill/>
-          </a:ln>
-        </p:spPr>
-        <p:txBody>
-          <a:bodyPr rtlCol="0" anchor="ctr"/>
-          <a:lstStyle/>
-          <a:p>
-            <a:pPr algn="ctr"/>
-          </a:p>
-        </p:txBody>
-      </p:sp>
+        </p:spPr>
+      </p:pic>
       <p:sp>
         <p:nvSpPr>
           <p:cNvPr id="2" name="Title 1"/>
@@ -3690,8 +3329,8 @@
         </p:nvSpPr>
         <p:spPr>
           <a:xfrm>
-            <a:off x="1463003" y="2331720"/>
-            <a:ext cx="9265688" cy="1371600"/>
+            <a:off x="853418" y="2057400"/>
+            <a:ext cx="6095847" cy="1554480"/>
           </a:xfrm>
         </p:spPr>
         <p:txBody>
@@ -3700,7 +3339,7 @@
           </a:bodyPr>
           <a:lstStyle/>
           <a:p>
-            <a:pPr algn="ctr">
+            <a:pPr algn="l">
               <a:lnSpc>
                 <a:spcPct val="105000"/>
               </a:lnSpc>
@@ -3711,21 +3350,21 @@
                   <a:srgbClr val="492713"/>
                 </a:solidFill>
               </a:rPr>
-              <a:t>두 사람이 하나 되는 날</a:t>
-            </a:r>
-          </a:p>
-        </p:txBody>
-      </p:sp>
-      <p:sp>
-        <p:nvSpPr>
-          <p:cNvPr id="16" name="한 줄 문구"/>
+              <a:t>저희 결혼합니다</a:t>
+            </a:r>
+          </a:p>
+        </p:txBody>
+      </p:sp>
+      <p:sp>
+        <p:nvSpPr>
+          <p:cNvPr id="4" name="한 줄 문구"/>
           <p:cNvSpPr txBox="1"/>
           <p:nvPr/>
         </p:nvSpPr>
         <p:spPr>
           <a:xfrm>
-            <a:off x="1463003" y="3794760"/>
-            <a:ext cx="9265688" cy="822960"/>
+            <a:off x="853418" y="3749039"/>
+            <a:ext cx="6095847" cy="822960"/>
           </a:xfrm>
           <a:prstGeom prst="rect">
             <a:avLst/>
@@ -3738,7 +3377,7 @@
           </a:bodyPr>
           <a:lstStyle/>
           <a:p>
-            <a:pPr algn="ctr">
+            <a:pPr algn="l">
               <a:lnSpc>
                 <a:spcPct val="115000"/>
               </a:lnSpc>
@@ -3749,21 +3388,21 @@
                   <a:srgbClr val="492713"/>
                 </a:solidFill>
               </a:rPr>
-              <a:t>군고구마처럼 따뜻하고 달콤하게 살겠습니다</a:t>
-            </a:r>
-          </a:p>
-        </p:txBody>
-      </p:sp>
-      <p:sp>
-        <p:nvSpPr>
-          <p:cNvPr id="17" name="안내 문구"/>
+              <a:t>사진 촬영은 식이 끝난 뒤에 합니다</a:t>
+            </a:r>
+          </a:p>
+        </p:txBody>
+      </p:sp>
+      <p:sp>
+        <p:nvSpPr>
+          <p:cNvPr id="5" name="안내 문구"/>
           <p:cNvSpPr txBox="1"/>
           <p:nvPr/>
         </p:nvSpPr>
         <p:spPr>
           <a:xfrm>
-            <a:off x="1463003" y="4663440"/>
-            <a:ext cx="9265688" cy="914400"/>
+            <a:off x="853418" y="4617720"/>
+            <a:ext cx="6095847" cy="914400"/>
           </a:xfrm>
           <a:prstGeom prst="rect">
             <a:avLst/>
@@ -3776,7 +3415,7 @@
           </a:bodyPr>
           <a:lstStyle/>
           <a:p>
-            <a:pPr algn="ctr">
+            <a:pPr algn="l">
               <a:lnSpc>
                 <a:spcPct val="115000"/>
               </a:lnSpc>
@@ -3791,7 +3430,7 @@
             </a:r>
           </a:p>
           <a:p>
-            <a:pPr algn="ctr">
+            <a:pPr algn="l">
               <a:lnSpc>
                 <a:spcPct val="115000"/>
               </a:lnSpc>
@@ -3802,7 +3441,7 @@
                   <a:srgbClr val="666666"/>
                 </a:solidFill>
               </a:rPr>
-              <a:t>2026. 00. 00 · 예식장 이름</a:t>
+              <a:t>2027. 00. 00 · 예식장 이름</a:t>
             </a:r>
           </a:p>
         </p:txBody>
@@ -3893,325 +3532,6 @@
       </p:sp>
       <p:sp>
         <p:nvSpPr>
-          <p:cNvPr id="5" name="장식"/>
-          <p:cNvSpPr/>
-          <p:nvPr/>
-        </p:nvSpPr>
-        <p:spPr>
-          <a:xfrm>
-            <a:off x="10914538" y="631759"/>
-            <a:ext cx="185261" cy="185261"/>
-          </a:xfrm>
-          <a:prstGeom prst="ellipse">
-            <a:avLst/>
-          </a:prstGeom>
-          <a:solidFill>
-            <a:srgbClr val="995229"/>
-          </a:solidFill>
-          <a:ln>
-            <a:noFill/>
-          </a:ln>
-        </p:spPr>
-        <p:txBody>
-          <a:bodyPr rtlCol="0" anchor="ctr"/>
-          <a:lstStyle/>
-          <a:p>
-            <a:pPr algn="ctr"/>
-          </a:p>
-        </p:txBody>
-      </p:sp>
-      <p:sp>
-        <p:nvSpPr>
-          <p:cNvPr id="6" name="장식"/>
-          <p:cNvSpPr/>
-          <p:nvPr/>
-        </p:nvSpPr>
-        <p:spPr>
-          <a:xfrm>
-            <a:off x="11491036" y="1099893"/>
-            <a:ext cx="111201" cy="111201"/>
-          </a:xfrm>
-          <a:prstGeom prst="ellipse">
-            <a:avLst/>
-          </a:prstGeom>
-          <a:solidFill>
-            <a:srgbClr val="F4DBCD"/>
-          </a:solidFill>
-          <a:ln>
-            <a:noFill/>
-          </a:ln>
-        </p:spPr>
-        <p:txBody>
-          <a:bodyPr rtlCol="0" anchor="ctr"/>
-          <a:lstStyle/>
-          <a:p>
-            <a:pPr algn="ctr"/>
-          </a:p>
-        </p:txBody>
-      </p:sp>
-      <p:sp>
-        <p:nvSpPr>
-          <p:cNvPr id="7" name="장식"/>
-          <p:cNvSpPr/>
-          <p:nvPr/>
-        </p:nvSpPr>
-        <p:spPr>
-          <a:xfrm>
-            <a:off x="10506607" y="843400"/>
-            <a:ext cx="146404" cy="146404"/>
-          </a:xfrm>
-          <a:prstGeom prst="ellipse">
-            <a:avLst/>
-          </a:prstGeom>
-          <a:solidFill>
-            <a:srgbClr val="3B9185"/>
-          </a:solidFill>
-          <a:ln>
-            <a:noFill/>
-          </a:ln>
-        </p:spPr>
-        <p:txBody>
-          <a:bodyPr rtlCol="0" anchor="ctr"/>
-          <a:lstStyle/>
-          <a:p>
-            <a:pPr algn="ctr"/>
-          </a:p>
-        </p:txBody>
-      </p:sp>
-      <p:sp>
-        <p:nvSpPr>
-          <p:cNvPr id="8" name="장식"/>
-          <p:cNvSpPr/>
-          <p:nvPr/>
-        </p:nvSpPr>
-        <p:spPr>
-          <a:xfrm>
-            <a:off x="11198146" y="619708"/>
-            <a:ext cx="120275" cy="120275"/>
-          </a:xfrm>
-          <a:prstGeom prst="ellipse">
-            <a:avLst/>
-          </a:prstGeom>
-          <a:solidFill>
-            <a:srgbClr val="995229"/>
-          </a:solidFill>
-          <a:ln>
-            <a:noFill/>
-          </a:ln>
-        </p:spPr>
-        <p:txBody>
-          <a:bodyPr rtlCol="0" anchor="ctr"/>
-          <a:lstStyle/>
-          <a:p>
-            <a:pPr algn="ctr"/>
-          </a:p>
-        </p:txBody>
-      </p:sp>
-      <p:sp>
-        <p:nvSpPr>
-          <p:cNvPr id="9" name="장식"/>
-          <p:cNvSpPr/>
-          <p:nvPr/>
-        </p:nvSpPr>
-        <p:spPr>
-          <a:xfrm>
-            <a:off x="11033527" y="398225"/>
-            <a:ext cx="186017" cy="186017"/>
-          </a:xfrm>
-          <a:prstGeom prst="ellipse">
-            <a:avLst/>
-          </a:prstGeom>
-          <a:solidFill>
-            <a:srgbClr val="F4DBCD"/>
-          </a:solidFill>
-          <a:ln>
-            <a:noFill/>
-          </a:ln>
-        </p:spPr>
-        <p:txBody>
-          <a:bodyPr rtlCol="0" anchor="ctr"/>
-          <a:lstStyle/>
-          <a:p>
-            <a:pPr algn="ctr"/>
-          </a:p>
-        </p:txBody>
-      </p:sp>
-      <p:sp>
-        <p:nvSpPr>
-          <p:cNvPr id="10" name="장식"/>
-          <p:cNvSpPr/>
-          <p:nvPr/>
-        </p:nvSpPr>
-        <p:spPr>
-          <a:xfrm>
-            <a:off x="10682891" y="656597"/>
-            <a:ext cx="79826" cy="79826"/>
-          </a:xfrm>
-          <a:prstGeom prst="ellipse">
-            <a:avLst/>
-          </a:prstGeom>
-          <a:solidFill>
-            <a:srgbClr val="3B9185"/>
-          </a:solidFill>
-          <a:ln>
-            <a:noFill/>
-          </a:ln>
-        </p:spPr>
-        <p:txBody>
-          <a:bodyPr rtlCol="0" anchor="ctr"/>
-          <a:lstStyle/>
-          <a:p>
-            <a:pPr algn="ctr"/>
-          </a:p>
-        </p:txBody>
-      </p:sp>
-      <p:sp>
-        <p:nvSpPr>
-          <p:cNvPr id="11" name="장식"/>
-          <p:cNvSpPr/>
-          <p:nvPr/>
-        </p:nvSpPr>
-        <p:spPr>
-          <a:xfrm>
-            <a:off x="11301345" y="1367190"/>
-            <a:ext cx="158557" cy="158557"/>
-          </a:xfrm>
-          <a:prstGeom prst="ellipse">
-            <a:avLst/>
-          </a:prstGeom>
-          <a:solidFill>
-            <a:srgbClr val="995229"/>
-          </a:solidFill>
-          <a:ln>
-            <a:noFill/>
-          </a:ln>
-        </p:spPr>
-        <p:txBody>
-          <a:bodyPr rtlCol="0" anchor="ctr"/>
-          <a:lstStyle/>
-          <a:p>
-            <a:pPr algn="ctr"/>
-          </a:p>
-        </p:txBody>
-      </p:sp>
-      <p:sp>
-        <p:nvSpPr>
-          <p:cNvPr id="12" name="장식"/>
-          <p:cNvSpPr/>
-          <p:nvPr/>
-        </p:nvSpPr>
-        <p:spPr>
-          <a:xfrm>
-            <a:off x="11059707" y="707976"/>
-            <a:ext cx="148776" cy="148776"/>
-          </a:xfrm>
-          <a:prstGeom prst="ellipse">
-            <a:avLst/>
-          </a:prstGeom>
-          <a:solidFill>
-            <a:srgbClr val="F4DBCD"/>
-          </a:solidFill>
-          <a:ln>
-            <a:noFill/>
-          </a:ln>
-        </p:spPr>
-        <p:txBody>
-          <a:bodyPr rtlCol="0" anchor="ctr"/>
-          <a:lstStyle/>
-          <a:p>
-            <a:pPr algn="ctr"/>
-          </a:p>
-        </p:txBody>
-      </p:sp>
-      <p:sp>
-        <p:nvSpPr>
-          <p:cNvPr id="13" name="장식"/>
-          <p:cNvSpPr/>
-          <p:nvPr/>
-        </p:nvSpPr>
-        <p:spPr>
-          <a:xfrm>
-            <a:off x="11352247" y="1000807"/>
-            <a:ext cx="157967" cy="157967"/>
-          </a:xfrm>
-          <a:prstGeom prst="ellipse">
-            <a:avLst/>
-          </a:prstGeom>
-          <a:solidFill>
-            <a:srgbClr val="3B9185"/>
-          </a:solidFill>
-          <a:ln>
-            <a:noFill/>
-          </a:ln>
-        </p:spPr>
-        <p:txBody>
-          <a:bodyPr rtlCol="0" anchor="ctr"/>
-          <a:lstStyle/>
-          <a:p>
-            <a:pPr algn="ctr"/>
-          </a:p>
-        </p:txBody>
-      </p:sp>
-      <p:sp>
-        <p:nvSpPr>
-          <p:cNvPr id="14" name="장식"/>
-          <p:cNvSpPr/>
-          <p:nvPr/>
-        </p:nvSpPr>
-        <p:spPr>
-          <a:xfrm>
-            <a:off x="10751978" y="615189"/>
-            <a:ext cx="100367" cy="100367"/>
-          </a:xfrm>
-          <a:prstGeom prst="ellipse">
-            <a:avLst/>
-          </a:prstGeom>
-          <a:solidFill>
-            <a:srgbClr val="995229"/>
-          </a:solidFill>
-          <a:ln>
-            <a:noFill/>
-          </a:ln>
-        </p:spPr>
-        <p:txBody>
-          <a:bodyPr rtlCol="0" anchor="ctr"/>
-          <a:lstStyle/>
-          <a:p>
-            <a:pPr algn="ctr"/>
-          </a:p>
-        </p:txBody>
-      </p:sp>
-      <p:sp>
-        <p:nvSpPr>
-          <p:cNvPr id="15" name="장식"/>
-          <p:cNvSpPr/>
-          <p:nvPr/>
-        </p:nvSpPr>
-        <p:spPr>
-          <a:xfrm>
-            <a:off x="10594948" y="721318"/>
-            <a:ext cx="69230" cy="69230"/>
-          </a:xfrm>
-          <a:prstGeom prst="ellipse">
-            <a:avLst/>
-          </a:prstGeom>
-          <a:solidFill>
-            <a:srgbClr val="F4DBCD"/>
-          </a:solidFill>
-          <a:ln>
-            <a:noFill/>
-          </a:ln>
-        </p:spPr>
-        <p:txBody>
-          <a:bodyPr rtlCol="0" anchor="ctr"/>
-          <a:lstStyle/>
-          <a:p>
-            <a:pPr algn="ctr"/>
-          </a:p>
-        </p:txBody>
-      </p:sp>
-      <p:sp>
-        <p:nvSpPr>
           <p:cNvPr id="2" name="Title 1"/>
           <p:cNvSpPr>
             <a:spLocks noGrp="1"/>
@@ -4250,7 +3570,7 @@
       </p:sp>
       <p:sp>
         <p:nvSpPr>
-          <p:cNvPr id="16" name="사진 자리"/>
+          <p:cNvPr id="5" name="사진 자리"/>
           <p:cNvSpPr/>
           <p:nvPr/>
         </p:nvSpPr>
@@ -4296,7 +3616,7 @@
       </p:sp>
       <p:sp>
         <p:nvSpPr>
-          <p:cNvPr id="17" name="TextBox 16"/>
+          <p:cNvPr id="6" name="TextBox 5"/>
           <p:cNvSpPr txBox="1"/>
           <p:nvPr/>
         </p:nvSpPr>
@@ -4334,7 +3654,7 @@
       </p:sp>
       <p:sp>
         <p:nvSpPr>
-          <p:cNvPr id="18" name="TextBox 17"/>
+          <p:cNvPr id="7" name="TextBox 6"/>
           <p:cNvSpPr txBox="1"/>
           <p:nvPr/>
         </p:nvSpPr>
@@ -4402,7 +3722,7 @@
       </p:sp>
       <p:sp>
         <p:nvSpPr>
-          <p:cNvPr id="19" name="사진 자리"/>
+          <p:cNvPr id="8" name="사진 자리"/>
           <p:cNvSpPr/>
           <p:nvPr/>
         </p:nvSpPr>
@@ -4448,7 +3768,7 @@
       </p:sp>
       <p:sp>
         <p:nvSpPr>
-          <p:cNvPr id="20" name="TextBox 19"/>
+          <p:cNvPr id="9" name="TextBox 8"/>
           <p:cNvSpPr txBox="1"/>
           <p:nvPr/>
         </p:nvSpPr>
@@ -4486,7 +3806,7 @@
       </p:sp>
       <p:sp>
         <p:nvSpPr>
-          <p:cNvPr id="21" name="TextBox 20"/>
+          <p:cNvPr id="10" name="TextBox 9"/>
           <p:cNvSpPr txBox="1"/>
           <p:nvPr/>
         </p:nvSpPr>
@@ -4638,325 +3958,6 @@
       </p:sp>
       <p:sp>
         <p:nvSpPr>
-          <p:cNvPr id="5" name="장식"/>
-          <p:cNvSpPr/>
-          <p:nvPr/>
-        </p:nvSpPr>
-        <p:spPr>
-          <a:xfrm>
-            <a:off x="10914538" y="631759"/>
-            <a:ext cx="185261" cy="185261"/>
-          </a:xfrm>
-          <a:prstGeom prst="ellipse">
-            <a:avLst/>
-          </a:prstGeom>
-          <a:solidFill>
-            <a:srgbClr val="995229"/>
-          </a:solidFill>
-          <a:ln>
-            <a:noFill/>
-          </a:ln>
-        </p:spPr>
-        <p:txBody>
-          <a:bodyPr rtlCol="0" anchor="ctr"/>
-          <a:lstStyle/>
-          <a:p>
-            <a:pPr algn="ctr"/>
-          </a:p>
-        </p:txBody>
-      </p:sp>
-      <p:sp>
-        <p:nvSpPr>
-          <p:cNvPr id="6" name="장식"/>
-          <p:cNvSpPr/>
-          <p:nvPr/>
-        </p:nvSpPr>
-        <p:spPr>
-          <a:xfrm>
-            <a:off x="11491036" y="1099893"/>
-            <a:ext cx="111201" cy="111201"/>
-          </a:xfrm>
-          <a:prstGeom prst="ellipse">
-            <a:avLst/>
-          </a:prstGeom>
-          <a:solidFill>
-            <a:srgbClr val="F4DBCD"/>
-          </a:solidFill>
-          <a:ln>
-            <a:noFill/>
-          </a:ln>
-        </p:spPr>
-        <p:txBody>
-          <a:bodyPr rtlCol="0" anchor="ctr"/>
-          <a:lstStyle/>
-          <a:p>
-            <a:pPr algn="ctr"/>
-          </a:p>
-        </p:txBody>
-      </p:sp>
-      <p:sp>
-        <p:nvSpPr>
-          <p:cNvPr id="7" name="장식"/>
-          <p:cNvSpPr/>
-          <p:nvPr/>
-        </p:nvSpPr>
-        <p:spPr>
-          <a:xfrm>
-            <a:off x="10506607" y="843400"/>
-            <a:ext cx="146404" cy="146404"/>
-          </a:xfrm>
-          <a:prstGeom prst="ellipse">
-            <a:avLst/>
-          </a:prstGeom>
-          <a:solidFill>
-            <a:srgbClr val="3B9185"/>
-          </a:solidFill>
-          <a:ln>
-            <a:noFill/>
-          </a:ln>
-        </p:spPr>
-        <p:txBody>
-          <a:bodyPr rtlCol="0" anchor="ctr"/>
-          <a:lstStyle/>
-          <a:p>
-            <a:pPr algn="ctr"/>
-          </a:p>
-        </p:txBody>
-      </p:sp>
-      <p:sp>
-        <p:nvSpPr>
-          <p:cNvPr id="8" name="장식"/>
-          <p:cNvSpPr/>
-          <p:nvPr/>
-        </p:nvSpPr>
-        <p:spPr>
-          <a:xfrm>
-            <a:off x="11198146" y="619708"/>
-            <a:ext cx="120275" cy="120275"/>
-          </a:xfrm>
-          <a:prstGeom prst="ellipse">
-            <a:avLst/>
-          </a:prstGeom>
-          <a:solidFill>
-            <a:srgbClr val="995229"/>
-          </a:solidFill>
-          <a:ln>
-            <a:noFill/>
-          </a:ln>
-        </p:spPr>
-        <p:txBody>
-          <a:bodyPr rtlCol="0" anchor="ctr"/>
-          <a:lstStyle/>
-          <a:p>
-            <a:pPr algn="ctr"/>
-          </a:p>
-        </p:txBody>
-      </p:sp>
-      <p:sp>
-        <p:nvSpPr>
-          <p:cNvPr id="9" name="장식"/>
-          <p:cNvSpPr/>
-          <p:nvPr/>
-        </p:nvSpPr>
-        <p:spPr>
-          <a:xfrm>
-            <a:off x="11033527" y="398225"/>
-            <a:ext cx="186017" cy="186017"/>
-          </a:xfrm>
-          <a:prstGeom prst="ellipse">
-            <a:avLst/>
-          </a:prstGeom>
-          <a:solidFill>
-            <a:srgbClr val="F4DBCD"/>
-          </a:solidFill>
-          <a:ln>
-            <a:noFill/>
-          </a:ln>
-        </p:spPr>
-        <p:txBody>
-          <a:bodyPr rtlCol="0" anchor="ctr"/>
-          <a:lstStyle/>
-          <a:p>
-            <a:pPr algn="ctr"/>
-          </a:p>
-        </p:txBody>
-      </p:sp>
-      <p:sp>
-        <p:nvSpPr>
-          <p:cNvPr id="10" name="장식"/>
-          <p:cNvSpPr/>
-          <p:nvPr/>
-        </p:nvSpPr>
-        <p:spPr>
-          <a:xfrm>
-            <a:off x="10682891" y="656597"/>
-            <a:ext cx="79826" cy="79826"/>
-          </a:xfrm>
-          <a:prstGeom prst="ellipse">
-            <a:avLst/>
-          </a:prstGeom>
-          <a:solidFill>
-            <a:srgbClr val="3B9185"/>
-          </a:solidFill>
-          <a:ln>
-            <a:noFill/>
-          </a:ln>
-        </p:spPr>
-        <p:txBody>
-          <a:bodyPr rtlCol="0" anchor="ctr"/>
-          <a:lstStyle/>
-          <a:p>
-            <a:pPr algn="ctr"/>
-          </a:p>
-        </p:txBody>
-      </p:sp>
-      <p:sp>
-        <p:nvSpPr>
-          <p:cNvPr id="11" name="장식"/>
-          <p:cNvSpPr/>
-          <p:nvPr/>
-        </p:nvSpPr>
-        <p:spPr>
-          <a:xfrm>
-            <a:off x="11301345" y="1367190"/>
-            <a:ext cx="158557" cy="158557"/>
-          </a:xfrm>
-          <a:prstGeom prst="ellipse">
-            <a:avLst/>
-          </a:prstGeom>
-          <a:solidFill>
-            <a:srgbClr val="995229"/>
-          </a:solidFill>
-          <a:ln>
-            <a:noFill/>
-          </a:ln>
-        </p:spPr>
-        <p:txBody>
-          <a:bodyPr rtlCol="0" anchor="ctr"/>
-          <a:lstStyle/>
-          <a:p>
-            <a:pPr algn="ctr"/>
-          </a:p>
-        </p:txBody>
-      </p:sp>
-      <p:sp>
-        <p:nvSpPr>
-          <p:cNvPr id="12" name="장식"/>
-          <p:cNvSpPr/>
-          <p:nvPr/>
-        </p:nvSpPr>
-        <p:spPr>
-          <a:xfrm>
-            <a:off x="11059707" y="707976"/>
-            <a:ext cx="148776" cy="148776"/>
-          </a:xfrm>
-          <a:prstGeom prst="ellipse">
-            <a:avLst/>
-          </a:prstGeom>
-          <a:solidFill>
-            <a:srgbClr val="F4DBCD"/>
-          </a:solidFill>
-          <a:ln>
-            <a:noFill/>
-          </a:ln>
-        </p:spPr>
-        <p:txBody>
-          <a:bodyPr rtlCol="0" anchor="ctr"/>
-          <a:lstStyle/>
-          <a:p>
-            <a:pPr algn="ctr"/>
-          </a:p>
-        </p:txBody>
-      </p:sp>
-      <p:sp>
-        <p:nvSpPr>
-          <p:cNvPr id="13" name="장식"/>
-          <p:cNvSpPr/>
-          <p:nvPr/>
-        </p:nvSpPr>
-        <p:spPr>
-          <a:xfrm>
-            <a:off x="11352247" y="1000807"/>
-            <a:ext cx="157967" cy="157967"/>
-          </a:xfrm>
-          <a:prstGeom prst="ellipse">
-            <a:avLst/>
-          </a:prstGeom>
-          <a:solidFill>
-            <a:srgbClr val="3B9185"/>
-          </a:solidFill>
-          <a:ln>
-            <a:noFill/>
-          </a:ln>
-        </p:spPr>
-        <p:txBody>
-          <a:bodyPr rtlCol="0" anchor="ctr"/>
-          <a:lstStyle/>
-          <a:p>
-            <a:pPr algn="ctr"/>
-          </a:p>
-        </p:txBody>
-      </p:sp>
-      <p:sp>
-        <p:nvSpPr>
-          <p:cNvPr id="14" name="장식"/>
-          <p:cNvSpPr/>
-          <p:nvPr/>
-        </p:nvSpPr>
-        <p:spPr>
-          <a:xfrm>
-            <a:off x="10751978" y="615189"/>
-            <a:ext cx="100367" cy="100367"/>
-          </a:xfrm>
-          <a:prstGeom prst="ellipse">
-            <a:avLst/>
-          </a:prstGeom>
-          <a:solidFill>
-            <a:srgbClr val="995229"/>
-          </a:solidFill>
-          <a:ln>
-            <a:noFill/>
-          </a:ln>
-        </p:spPr>
-        <p:txBody>
-          <a:bodyPr rtlCol="0" anchor="ctr"/>
-          <a:lstStyle/>
-          <a:p>
-            <a:pPr algn="ctr"/>
-          </a:p>
-        </p:txBody>
-      </p:sp>
-      <p:sp>
-        <p:nvSpPr>
-          <p:cNvPr id="15" name="장식"/>
-          <p:cNvSpPr/>
-          <p:nvPr/>
-        </p:nvSpPr>
-        <p:spPr>
-          <a:xfrm>
-            <a:off x="10594948" y="721318"/>
-            <a:ext cx="69230" cy="69230"/>
-          </a:xfrm>
-          <a:prstGeom prst="ellipse">
-            <a:avLst/>
-          </a:prstGeom>
-          <a:solidFill>
-            <a:srgbClr val="F4DBCD"/>
-          </a:solidFill>
-          <a:ln>
-            <a:noFill/>
-          </a:ln>
-        </p:spPr>
-        <p:txBody>
-          <a:bodyPr rtlCol="0" anchor="ctr"/>
-          <a:lstStyle/>
-          <a:p>
-            <a:pPr algn="ctr"/>
-          </a:p>
-        </p:txBody>
-      </p:sp>
-      <p:sp>
-        <p:nvSpPr>
           <p:cNvPr id="2" name="Title 1"/>
           <p:cNvSpPr>
             <a:spLocks noGrp="1"/>
@@ -4995,7 +3996,7 @@
       </p:sp>
       <p:graphicFrame>
         <p:nvGraphicFramePr>
-          <p:cNvPr id="16" name="표"/>
+          <p:cNvPr id="5" name="표"/>
           <p:cNvGraphicFramePr>
             <a:graphicFrameLocks noGrp="1"/>
           </p:cNvGraphicFramePr>
@@ -5946,325 +4947,6 @@
       </p:sp>
       <p:sp>
         <p:nvSpPr>
-          <p:cNvPr id="5" name="장식"/>
-          <p:cNvSpPr/>
-          <p:nvPr/>
-        </p:nvSpPr>
-        <p:spPr>
-          <a:xfrm>
-            <a:off x="10914538" y="631759"/>
-            <a:ext cx="185261" cy="185261"/>
-          </a:xfrm>
-          <a:prstGeom prst="ellipse">
-            <a:avLst/>
-          </a:prstGeom>
-          <a:solidFill>
-            <a:srgbClr val="995229"/>
-          </a:solidFill>
-          <a:ln>
-            <a:noFill/>
-          </a:ln>
-        </p:spPr>
-        <p:txBody>
-          <a:bodyPr rtlCol="0" anchor="ctr"/>
-          <a:lstStyle/>
-          <a:p>
-            <a:pPr algn="ctr"/>
-          </a:p>
-        </p:txBody>
-      </p:sp>
-      <p:sp>
-        <p:nvSpPr>
-          <p:cNvPr id="6" name="장식"/>
-          <p:cNvSpPr/>
-          <p:nvPr/>
-        </p:nvSpPr>
-        <p:spPr>
-          <a:xfrm>
-            <a:off x="11491036" y="1099893"/>
-            <a:ext cx="111201" cy="111201"/>
-          </a:xfrm>
-          <a:prstGeom prst="ellipse">
-            <a:avLst/>
-          </a:prstGeom>
-          <a:solidFill>
-            <a:srgbClr val="F4DBCD"/>
-          </a:solidFill>
-          <a:ln>
-            <a:noFill/>
-          </a:ln>
-        </p:spPr>
-        <p:txBody>
-          <a:bodyPr rtlCol="0" anchor="ctr"/>
-          <a:lstStyle/>
-          <a:p>
-            <a:pPr algn="ctr"/>
-          </a:p>
-        </p:txBody>
-      </p:sp>
-      <p:sp>
-        <p:nvSpPr>
-          <p:cNvPr id="7" name="장식"/>
-          <p:cNvSpPr/>
-          <p:nvPr/>
-        </p:nvSpPr>
-        <p:spPr>
-          <a:xfrm>
-            <a:off x="10506607" y="843400"/>
-            <a:ext cx="146404" cy="146404"/>
-          </a:xfrm>
-          <a:prstGeom prst="ellipse">
-            <a:avLst/>
-          </a:prstGeom>
-          <a:solidFill>
-            <a:srgbClr val="3B9185"/>
-          </a:solidFill>
-          <a:ln>
-            <a:noFill/>
-          </a:ln>
-        </p:spPr>
-        <p:txBody>
-          <a:bodyPr rtlCol="0" anchor="ctr"/>
-          <a:lstStyle/>
-          <a:p>
-            <a:pPr algn="ctr"/>
-          </a:p>
-        </p:txBody>
-      </p:sp>
-      <p:sp>
-        <p:nvSpPr>
-          <p:cNvPr id="8" name="장식"/>
-          <p:cNvSpPr/>
-          <p:nvPr/>
-        </p:nvSpPr>
-        <p:spPr>
-          <a:xfrm>
-            <a:off x="11198146" y="619708"/>
-            <a:ext cx="120275" cy="120275"/>
-          </a:xfrm>
-          <a:prstGeom prst="ellipse">
-            <a:avLst/>
-          </a:prstGeom>
-          <a:solidFill>
-            <a:srgbClr val="995229"/>
-          </a:solidFill>
-          <a:ln>
-            <a:noFill/>
-          </a:ln>
-        </p:spPr>
-        <p:txBody>
-          <a:bodyPr rtlCol="0" anchor="ctr"/>
-          <a:lstStyle/>
-          <a:p>
-            <a:pPr algn="ctr"/>
-          </a:p>
-        </p:txBody>
-      </p:sp>
-      <p:sp>
-        <p:nvSpPr>
-          <p:cNvPr id="9" name="장식"/>
-          <p:cNvSpPr/>
-          <p:nvPr/>
-        </p:nvSpPr>
-        <p:spPr>
-          <a:xfrm>
-            <a:off x="11033527" y="398225"/>
-            <a:ext cx="186017" cy="186017"/>
-          </a:xfrm>
-          <a:prstGeom prst="ellipse">
-            <a:avLst/>
-          </a:prstGeom>
-          <a:solidFill>
-            <a:srgbClr val="F4DBCD"/>
-          </a:solidFill>
-          <a:ln>
-            <a:noFill/>
-          </a:ln>
-        </p:spPr>
-        <p:txBody>
-          <a:bodyPr rtlCol="0" anchor="ctr"/>
-          <a:lstStyle/>
-          <a:p>
-            <a:pPr algn="ctr"/>
-          </a:p>
-        </p:txBody>
-      </p:sp>
-      <p:sp>
-        <p:nvSpPr>
-          <p:cNvPr id="10" name="장식"/>
-          <p:cNvSpPr/>
-          <p:nvPr/>
-        </p:nvSpPr>
-        <p:spPr>
-          <a:xfrm>
-            <a:off x="10682891" y="656597"/>
-            <a:ext cx="79826" cy="79826"/>
-          </a:xfrm>
-          <a:prstGeom prst="ellipse">
-            <a:avLst/>
-          </a:prstGeom>
-          <a:solidFill>
-            <a:srgbClr val="3B9185"/>
-          </a:solidFill>
-          <a:ln>
-            <a:noFill/>
-          </a:ln>
-        </p:spPr>
-        <p:txBody>
-          <a:bodyPr rtlCol="0" anchor="ctr"/>
-          <a:lstStyle/>
-          <a:p>
-            <a:pPr algn="ctr"/>
-          </a:p>
-        </p:txBody>
-      </p:sp>
-      <p:sp>
-        <p:nvSpPr>
-          <p:cNvPr id="11" name="장식"/>
-          <p:cNvSpPr/>
-          <p:nvPr/>
-        </p:nvSpPr>
-        <p:spPr>
-          <a:xfrm>
-            <a:off x="11301345" y="1367190"/>
-            <a:ext cx="158557" cy="158557"/>
-          </a:xfrm>
-          <a:prstGeom prst="ellipse">
-            <a:avLst/>
-          </a:prstGeom>
-          <a:solidFill>
-            <a:srgbClr val="995229"/>
-          </a:solidFill>
-          <a:ln>
-            <a:noFill/>
-          </a:ln>
-        </p:spPr>
-        <p:txBody>
-          <a:bodyPr rtlCol="0" anchor="ctr"/>
-          <a:lstStyle/>
-          <a:p>
-            <a:pPr algn="ctr"/>
-          </a:p>
-        </p:txBody>
-      </p:sp>
-      <p:sp>
-        <p:nvSpPr>
-          <p:cNvPr id="12" name="장식"/>
-          <p:cNvSpPr/>
-          <p:nvPr/>
-        </p:nvSpPr>
-        <p:spPr>
-          <a:xfrm>
-            <a:off x="11059707" y="707976"/>
-            <a:ext cx="148776" cy="148776"/>
-          </a:xfrm>
-          <a:prstGeom prst="ellipse">
-            <a:avLst/>
-          </a:prstGeom>
-          <a:solidFill>
-            <a:srgbClr val="F4DBCD"/>
-          </a:solidFill>
-          <a:ln>
-            <a:noFill/>
-          </a:ln>
-        </p:spPr>
-        <p:txBody>
-          <a:bodyPr rtlCol="0" anchor="ctr"/>
-          <a:lstStyle/>
-          <a:p>
-            <a:pPr algn="ctr"/>
-          </a:p>
-        </p:txBody>
-      </p:sp>
-      <p:sp>
-        <p:nvSpPr>
-          <p:cNvPr id="13" name="장식"/>
-          <p:cNvSpPr/>
-          <p:nvPr/>
-        </p:nvSpPr>
-        <p:spPr>
-          <a:xfrm>
-            <a:off x="11352247" y="1000807"/>
-            <a:ext cx="157967" cy="157967"/>
-          </a:xfrm>
-          <a:prstGeom prst="ellipse">
-            <a:avLst/>
-          </a:prstGeom>
-          <a:solidFill>
-            <a:srgbClr val="3B9185"/>
-          </a:solidFill>
-          <a:ln>
-            <a:noFill/>
-          </a:ln>
-        </p:spPr>
-        <p:txBody>
-          <a:bodyPr rtlCol="0" anchor="ctr"/>
-          <a:lstStyle/>
-          <a:p>
-            <a:pPr algn="ctr"/>
-          </a:p>
-        </p:txBody>
-      </p:sp>
-      <p:sp>
-        <p:nvSpPr>
-          <p:cNvPr id="14" name="장식"/>
-          <p:cNvSpPr/>
-          <p:nvPr/>
-        </p:nvSpPr>
-        <p:spPr>
-          <a:xfrm>
-            <a:off x="10751978" y="615189"/>
-            <a:ext cx="100367" cy="100367"/>
-          </a:xfrm>
-          <a:prstGeom prst="ellipse">
-            <a:avLst/>
-          </a:prstGeom>
-          <a:solidFill>
-            <a:srgbClr val="995229"/>
-          </a:solidFill>
-          <a:ln>
-            <a:noFill/>
-          </a:ln>
-        </p:spPr>
-        <p:txBody>
-          <a:bodyPr rtlCol="0" anchor="ctr"/>
-          <a:lstStyle/>
-          <a:p>
-            <a:pPr algn="ctr"/>
-          </a:p>
-        </p:txBody>
-      </p:sp>
-      <p:sp>
-        <p:nvSpPr>
-          <p:cNvPr id="15" name="장식"/>
-          <p:cNvSpPr/>
-          <p:nvPr/>
-        </p:nvSpPr>
-        <p:spPr>
-          <a:xfrm>
-            <a:off x="10594948" y="721318"/>
-            <a:ext cx="69230" cy="69230"/>
-          </a:xfrm>
-          <a:prstGeom prst="ellipse">
-            <a:avLst/>
-          </a:prstGeom>
-          <a:solidFill>
-            <a:srgbClr val="F4DBCD"/>
-          </a:solidFill>
-          <a:ln>
-            <a:noFill/>
-          </a:ln>
-        </p:spPr>
-        <p:txBody>
-          <a:bodyPr rtlCol="0" anchor="ctr"/>
-          <a:lstStyle/>
-          <a:p>
-            <a:pPr algn="ctr"/>
-          </a:p>
-        </p:txBody>
-      </p:sp>
-      <p:sp>
-        <p:nvSpPr>
           <p:cNvPr id="2" name="Title 1"/>
           <p:cNvSpPr>
             <a:spLocks noGrp="1"/>
@@ -6303,7 +4985,7 @@
       </p:sp>
       <p:sp>
         <p:nvSpPr>
-          <p:cNvPr id="16" name="카드 1"/>
+          <p:cNvPr id="5" name="카드 1"/>
           <p:cNvSpPr/>
           <p:nvPr/>
         </p:nvSpPr>
@@ -6336,7 +5018,7 @@
       </p:sp>
       <p:sp>
         <p:nvSpPr>
-          <p:cNvPr id="17" name="번호 1"/>
+          <p:cNvPr id="6" name="번호 1"/>
           <p:cNvSpPr/>
           <p:nvPr/>
         </p:nvSpPr>
@@ -6379,7 +5061,7 @@
       </p:sp>
       <p:sp>
         <p:nvSpPr>
-          <p:cNvPr id="18" name="TextBox 17"/>
+          <p:cNvPr id="7" name="TextBox 6"/>
           <p:cNvSpPr txBox="1"/>
           <p:nvPr/>
         </p:nvSpPr>
@@ -6417,7 +5099,7 @@
       </p:sp>
       <p:sp>
         <p:nvSpPr>
-          <p:cNvPr id="19" name="TextBox 18"/>
+          <p:cNvPr id="8" name="TextBox 7"/>
           <p:cNvSpPr txBox="1"/>
           <p:nvPr/>
         </p:nvSpPr>
@@ -6455,7 +5137,7 @@
       </p:sp>
       <p:sp>
         <p:nvSpPr>
-          <p:cNvPr id="20" name="카드 2"/>
+          <p:cNvPr id="9" name="카드 2"/>
           <p:cNvSpPr/>
           <p:nvPr/>
         </p:nvSpPr>
@@ -6488,7 +5170,7 @@
       </p:sp>
       <p:sp>
         <p:nvSpPr>
-          <p:cNvPr id="21" name="번호 2"/>
+          <p:cNvPr id="10" name="번호 2"/>
           <p:cNvSpPr/>
           <p:nvPr/>
         </p:nvSpPr>
@@ -6531,7 +5213,7 @@
       </p:sp>
       <p:sp>
         <p:nvSpPr>
-          <p:cNvPr id="22" name="TextBox 21"/>
+          <p:cNvPr id="11" name="TextBox 10"/>
           <p:cNvSpPr txBox="1"/>
           <p:nvPr/>
         </p:nvSpPr>
@@ -6569,7 +5251,7 @@
       </p:sp>
       <p:sp>
         <p:nvSpPr>
-          <p:cNvPr id="23" name="TextBox 22"/>
+          <p:cNvPr id="12" name="TextBox 11"/>
           <p:cNvSpPr txBox="1"/>
           <p:nvPr/>
         </p:nvSpPr>
@@ -6607,7 +5289,7 @@
       </p:sp>
       <p:sp>
         <p:nvSpPr>
-          <p:cNvPr id="24" name="카드 3"/>
+          <p:cNvPr id="13" name="카드 3"/>
           <p:cNvSpPr/>
           <p:nvPr/>
         </p:nvSpPr>
@@ -6640,7 +5322,7 @@
       </p:sp>
       <p:sp>
         <p:nvSpPr>
-          <p:cNvPr id="25" name="번호 3"/>
+          <p:cNvPr id="14" name="번호 3"/>
           <p:cNvSpPr/>
           <p:nvPr/>
         </p:nvSpPr>
@@ -6683,7 +5365,7 @@
       </p:sp>
       <p:sp>
         <p:nvSpPr>
-          <p:cNvPr id="26" name="TextBox 25"/>
+          <p:cNvPr id="15" name="TextBox 14"/>
           <p:cNvSpPr txBox="1"/>
           <p:nvPr/>
         </p:nvSpPr>
@@ -6721,7 +5403,7 @@
       </p:sp>
       <p:sp>
         <p:nvSpPr>
-          <p:cNvPr id="27" name="TextBox 26"/>
+          <p:cNvPr id="16" name="TextBox 15"/>
           <p:cNvSpPr txBox="1"/>
           <p:nvPr/>
         </p:nvSpPr>
@@ -6843,325 +5525,6 @@
       </p:sp>
       <p:sp>
         <p:nvSpPr>
-          <p:cNvPr id="5" name="장식"/>
-          <p:cNvSpPr/>
-          <p:nvPr/>
-        </p:nvSpPr>
-        <p:spPr>
-          <a:xfrm>
-            <a:off x="10914538" y="631759"/>
-            <a:ext cx="185261" cy="185261"/>
-          </a:xfrm>
-          <a:prstGeom prst="ellipse">
-            <a:avLst/>
-          </a:prstGeom>
-          <a:solidFill>
-            <a:srgbClr val="995229"/>
-          </a:solidFill>
-          <a:ln>
-            <a:noFill/>
-          </a:ln>
-        </p:spPr>
-        <p:txBody>
-          <a:bodyPr rtlCol="0" anchor="ctr"/>
-          <a:lstStyle/>
-          <a:p>
-            <a:pPr algn="ctr"/>
-          </a:p>
-        </p:txBody>
-      </p:sp>
-      <p:sp>
-        <p:nvSpPr>
-          <p:cNvPr id="6" name="장식"/>
-          <p:cNvSpPr/>
-          <p:nvPr/>
-        </p:nvSpPr>
-        <p:spPr>
-          <a:xfrm>
-            <a:off x="11491036" y="1099893"/>
-            <a:ext cx="111201" cy="111201"/>
-          </a:xfrm>
-          <a:prstGeom prst="ellipse">
-            <a:avLst/>
-          </a:prstGeom>
-          <a:solidFill>
-            <a:srgbClr val="F4DBCD"/>
-          </a:solidFill>
-          <a:ln>
-            <a:noFill/>
-          </a:ln>
-        </p:spPr>
-        <p:txBody>
-          <a:bodyPr rtlCol="0" anchor="ctr"/>
-          <a:lstStyle/>
-          <a:p>
-            <a:pPr algn="ctr"/>
-          </a:p>
-        </p:txBody>
-      </p:sp>
-      <p:sp>
-        <p:nvSpPr>
-          <p:cNvPr id="7" name="장식"/>
-          <p:cNvSpPr/>
-          <p:nvPr/>
-        </p:nvSpPr>
-        <p:spPr>
-          <a:xfrm>
-            <a:off x="10506607" y="843400"/>
-            <a:ext cx="146404" cy="146404"/>
-          </a:xfrm>
-          <a:prstGeom prst="ellipse">
-            <a:avLst/>
-          </a:prstGeom>
-          <a:solidFill>
-            <a:srgbClr val="3B9185"/>
-          </a:solidFill>
-          <a:ln>
-            <a:noFill/>
-          </a:ln>
-        </p:spPr>
-        <p:txBody>
-          <a:bodyPr rtlCol="0" anchor="ctr"/>
-          <a:lstStyle/>
-          <a:p>
-            <a:pPr algn="ctr"/>
-          </a:p>
-        </p:txBody>
-      </p:sp>
-      <p:sp>
-        <p:nvSpPr>
-          <p:cNvPr id="8" name="장식"/>
-          <p:cNvSpPr/>
-          <p:nvPr/>
-        </p:nvSpPr>
-        <p:spPr>
-          <a:xfrm>
-            <a:off x="11198146" y="619708"/>
-            <a:ext cx="120275" cy="120275"/>
-          </a:xfrm>
-          <a:prstGeom prst="ellipse">
-            <a:avLst/>
-          </a:prstGeom>
-          <a:solidFill>
-            <a:srgbClr val="995229"/>
-          </a:solidFill>
-          <a:ln>
-            <a:noFill/>
-          </a:ln>
-        </p:spPr>
-        <p:txBody>
-          <a:bodyPr rtlCol="0" anchor="ctr"/>
-          <a:lstStyle/>
-          <a:p>
-            <a:pPr algn="ctr"/>
-          </a:p>
-        </p:txBody>
-      </p:sp>
-      <p:sp>
-        <p:nvSpPr>
-          <p:cNvPr id="9" name="장식"/>
-          <p:cNvSpPr/>
-          <p:nvPr/>
-        </p:nvSpPr>
-        <p:spPr>
-          <a:xfrm>
-            <a:off x="11033527" y="398225"/>
-            <a:ext cx="186017" cy="186017"/>
-          </a:xfrm>
-          <a:prstGeom prst="ellipse">
-            <a:avLst/>
-          </a:prstGeom>
-          <a:solidFill>
-            <a:srgbClr val="F4DBCD"/>
-          </a:solidFill>
-          <a:ln>
-            <a:noFill/>
-          </a:ln>
-        </p:spPr>
-        <p:txBody>
-          <a:bodyPr rtlCol="0" anchor="ctr"/>
-          <a:lstStyle/>
-          <a:p>
-            <a:pPr algn="ctr"/>
-          </a:p>
-        </p:txBody>
-      </p:sp>
-      <p:sp>
-        <p:nvSpPr>
-          <p:cNvPr id="10" name="장식"/>
-          <p:cNvSpPr/>
-          <p:nvPr/>
-        </p:nvSpPr>
-        <p:spPr>
-          <a:xfrm>
-            <a:off x="10682891" y="656597"/>
-            <a:ext cx="79826" cy="79826"/>
-          </a:xfrm>
-          <a:prstGeom prst="ellipse">
-            <a:avLst/>
-          </a:prstGeom>
-          <a:solidFill>
-            <a:srgbClr val="3B9185"/>
-          </a:solidFill>
-          <a:ln>
-            <a:noFill/>
-          </a:ln>
-        </p:spPr>
-        <p:txBody>
-          <a:bodyPr rtlCol="0" anchor="ctr"/>
-          <a:lstStyle/>
-          <a:p>
-            <a:pPr algn="ctr"/>
-          </a:p>
-        </p:txBody>
-      </p:sp>
-      <p:sp>
-        <p:nvSpPr>
-          <p:cNvPr id="11" name="장식"/>
-          <p:cNvSpPr/>
-          <p:nvPr/>
-        </p:nvSpPr>
-        <p:spPr>
-          <a:xfrm>
-            <a:off x="11301345" y="1367190"/>
-            <a:ext cx="158557" cy="158557"/>
-          </a:xfrm>
-          <a:prstGeom prst="ellipse">
-            <a:avLst/>
-          </a:prstGeom>
-          <a:solidFill>
-            <a:srgbClr val="995229"/>
-          </a:solidFill>
-          <a:ln>
-            <a:noFill/>
-          </a:ln>
-        </p:spPr>
-        <p:txBody>
-          <a:bodyPr rtlCol="0" anchor="ctr"/>
-          <a:lstStyle/>
-          <a:p>
-            <a:pPr algn="ctr"/>
-          </a:p>
-        </p:txBody>
-      </p:sp>
-      <p:sp>
-        <p:nvSpPr>
-          <p:cNvPr id="12" name="장식"/>
-          <p:cNvSpPr/>
-          <p:nvPr/>
-        </p:nvSpPr>
-        <p:spPr>
-          <a:xfrm>
-            <a:off x="11059707" y="707976"/>
-            <a:ext cx="148776" cy="148776"/>
-          </a:xfrm>
-          <a:prstGeom prst="ellipse">
-            <a:avLst/>
-          </a:prstGeom>
-          <a:solidFill>
-            <a:srgbClr val="F4DBCD"/>
-          </a:solidFill>
-          <a:ln>
-            <a:noFill/>
-          </a:ln>
-        </p:spPr>
-        <p:txBody>
-          <a:bodyPr rtlCol="0" anchor="ctr"/>
-          <a:lstStyle/>
-          <a:p>
-            <a:pPr algn="ctr"/>
-          </a:p>
-        </p:txBody>
-      </p:sp>
-      <p:sp>
-        <p:nvSpPr>
-          <p:cNvPr id="13" name="장식"/>
-          <p:cNvSpPr/>
-          <p:nvPr/>
-        </p:nvSpPr>
-        <p:spPr>
-          <a:xfrm>
-            <a:off x="11352247" y="1000807"/>
-            <a:ext cx="157967" cy="157967"/>
-          </a:xfrm>
-          <a:prstGeom prst="ellipse">
-            <a:avLst/>
-          </a:prstGeom>
-          <a:solidFill>
-            <a:srgbClr val="3B9185"/>
-          </a:solidFill>
-          <a:ln>
-            <a:noFill/>
-          </a:ln>
-        </p:spPr>
-        <p:txBody>
-          <a:bodyPr rtlCol="0" anchor="ctr"/>
-          <a:lstStyle/>
-          <a:p>
-            <a:pPr algn="ctr"/>
-          </a:p>
-        </p:txBody>
-      </p:sp>
-      <p:sp>
-        <p:nvSpPr>
-          <p:cNvPr id="14" name="장식"/>
-          <p:cNvSpPr/>
-          <p:nvPr/>
-        </p:nvSpPr>
-        <p:spPr>
-          <a:xfrm>
-            <a:off x="10751978" y="615189"/>
-            <a:ext cx="100367" cy="100367"/>
-          </a:xfrm>
-          <a:prstGeom prst="ellipse">
-            <a:avLst/>
-          </a:prstGeom>
-          <a:solidFill>
-            <a:srgbClr val="995229"/>
-          </a:solidFill>
-          <a:ln>
-            <a:noFill/>
-          </a:ln>
-        </p:spPr>
-        <p:txBody>
-          <a:bodyPr rtlCol="0" anchor="ctr"/>
-          <a:lstStyle/>
-          <a:p>
-            <a:pPr algn="ctr"/>
-          </a:p>
-        </p:txBody>
-      </p:sp>
-      <p:sp>
-        <p:nvSpPr>
-          <p:cNvPr id="15" name="장식"/>
-          <p:cNvSpPr/>
-          <p:nvPr/>
-        </p:nvSpPr>
-        <p:spPr>
-          <a:xfrm>
-            <a:off x="10594948" y="721318"/>
-            <a:ext cx="69230" cy="69230"/>
-          </a:xfrm>
-          <a:prstGeom prst="ellipse">
-            <a:avLst/>
-          </a:prstGeom>
-          <a:solidFill>
-            <a:srgbClr val="F4DBCD"/>
-          </a:solidFill>
-          <a:ln>
-            <a:noFill/>
-          </a:ln>
-        </p:spPr>
-        <p:txBody>
-          <a:bodyPr rtlCol="0" anchor="ctr"/>
-          <a:lstStyle/>
-          <a:p>
-            <a:pPr algn="ctr"/>
-          </a:p>
-        </p:txBody>
-      </p:sp>
-      <p:sp>
-        <p:nvSpPr>
           <p:cNvPr id="2" name="Title 1"/>
           <p:cNvSpPr>
             <a:spLocks noGrp="1"/>
@@ -7200,7 +5563,7 @@
       </p:sp>
       <p:sp>
         <p:nvSpPr>
-          <p:cNvPr id="16" name="사진 자리"/>
+          <p:cNvPr id="5" name="사진 자리"/>
           <p:cNvSpPr/>
           <p:nvPr/>
         </p:nvSpPr>
@@ -7248,7 +5611,7 @@
       </p:sp>
       <p:sp>
         <p:nvSpPr>
-          <p:cNvPr id="17" name="사진 자리"/>
+          <p:cNvPr id="6" name="사진 자리"/>
           <p:cNvSpPr/>
           <p:nvPr/>
         </p:nvSpPr>
@@ -7296,7 +5659,7 @@
       </p:sp>
       <p:sp>
         <p:nvSpPr>
-          <p:cNvPr id="18" name="사진 자리"/>
+          <p:cNvPr id="7" name="사진 자리"/>
           <p:cNvSpPr/>
           <p:nvPr/>
         </p:nvSpPr>
@@ -7344,7 +5707,7 @@
       </p:sp>
       <p:sp>
         <p:nvSpPr>
-          <p:cNvPr id="19" name="사진 자리"/>
+          <p:cNvPr id="8" name="사진 자리"/>
           <p:cNvSpPr/>
           <p:nvPr/>
         </p:nvSpPr>
@@ -7392,7 +5755,7 @@
       </p:sp>
       <p:sp>
         <p:nvSpPr>
-          <p:cNvPr id="20" name="사진 자리"/>
+          <p:cNvPr id="9" name="사진 자리"/>
           <p:cNvSpPr/>
           <p:nvPr/>
         </p:nvSpPr>
@@ -7440,7 +5803,7 @@
       </p:sp>
       <p:sp>
         <p:nvSpPr>
-          <p:cNvPr id="21" name="사진 자리"/>
+          <p:cNvPr id="10" name="사진 자리"/>
           <p:cNvSpPr/>
           <p:nvPr/>
         </p:nvSpPr>
@@ -7497,14 +5860,6 @@
 <file path=ppt/slides/slide6.xml><?xml version="1.0" encoding="utf-8"?>
 <p:sld xmlns:a="http://schemas.openxmlformats.org/drawingml/2006/main" xmlns:p="http://schemas.openxmlformats.org/presentationml/2006/main" xmlns:r="http://schemas.openxmlformats.org/officeDocument/2006/relationships">
   <p:cSld>
-    <p:bg>
-      <p:bgPr>
-        <a:solidFill>
-          <a:srgbClr val="FBF3EF"/>
-        </a:solidFill>
-        <a:effectLst/>
-      </p:bgPr>
-    </p:bg>
     <p:spTree>
       <p:nvGrpSpPr>
         <p:cNvPr id="1" name=""/>
@@ -7512,383 +5867,30 @@
         <p:nvPr/>
       </p:nvGrpSpPr>
       <p:grpSpPr/>
-      <p:sp>
-        <p:nvSpPr>
-          <p:cNvPr id="3" name="장식"/>
-          <p:cNvSpPr/>
+      <p:pic>
+        <p:nvPicPr>
+          <p:cNvPr id="3" name="표지 그림" descr="wedding-38.jpg"/>
+          <p:cNvPicPr>
+            <a:picLocks noChangeAspect="1"/>
+          </p:cNvPicPr>
           <p:nvPr/>
-        </p:nvSpPr>
-        <p:spPr>
-          <a:xfrm>
-            <a:off x="274320" y="274320"/>
-            <a:ext cx="11643055" cy="6309360"/>
+        </p:nvPicPr>
+        <p:blipFill>
+          <a:blip r:embed="rId2"/>
+          <a:stretch>
+            <a:fillRect/>
+          </a:stretch>
+        </p:blipFill>
+        <p:spPr>
+          <a:xfrm>
+            <a:off x="0" y="0"/>
+            <a:ext cx="12191695" cy="6858000"/>
           </a:xfrm>
           <a:prstGeom prst="rect">
             <a:avLst/>
           </a:prstGeom>
-          <a:noFill/>
-          <a:ln w="38100">
-            <a:solidFill>
-              <a:srgbClr val="995229"/>
-            </a:solidFill>
-          </a:ln>
-        </p:spPr>
-        <p:txBody>
-          <a:bodyPr rtlCol="0" anchor="ctr"/>
-          <a:lstStyle/>
-          <a:p>
-            <a:pPr algn="ctr"/>
-          </a:p>
-        </p:txBody>
-      </p:sp>
-      <p:sp>
-        <p:nvSpPr>
-          <p:cNvPr id="4" name="장식"/>
-          <p:cNvSpPr/>
-          <p:nvPr/>
-        </p:nvSpPr>
-        <p:spPr>
-          <a:xfrm>
-            <a:off x="457200" y="457200"/>
-            <a:ext cx="11277295" cy="5943600"/>
-          </a:xfrm>
-          <a:prstGeom prst="rect">
-            <a:avLst/>
-          </a:prstGeom>
-          <a:noFill/>
-          <a:ln w="12700">
-            <a:solidFill>
-              <a:srgbClr val="F4DBCD"/>
-            </a:solidFill>
-          </a:ln>
-        </p:spPr>
-        <p:txBody>
-          <a:bodyPr rtlCol="0" anchor="ctr"/>
-          <a:lstStyle/>
-          <a:p>
-            <a:pPr algn="ctr"/>
-          </a:p>
-        </p:txBody>
-      </p:sp>
-      <p:sp>
-        <p:nvSpPr>
-          <p:cNvPr id="5" name="장식"/>
-          <p:cNvSpPr/>
-          <p:nvPr/>
-        </p:nvSpPr>
-        <p:spPr>
-          <a:xfrm>
-            <a:off x="5854364" y="780551"/>
-            <a:ext cx="333470" cy="333470"/>
-          </a:xfrm>
-          <a:prstGeom prst="ellipse">
-            <a:avLst/>
-          </a:prstGeom>
-          <a:solidFill>
-            <a:srgbClr val="995229"/>
-          </a:solidFill>
-          <a:ln>
-            <a:noFill/>
-          </a:ln>
-        </p:spPr>
-        <p:txBody>
-          <a:bodyPr rtlCol="0" anchor="ctr"/>
-          <a:lstStyle/>
-          <a:p>
-            <a:pPr algn="ctr"/>
-          </a:p>
-        </p:txBody>
-      </p:sp>
-      <p:sp>
-        <p:nvSpPr>
-          <p:cNvPr id="6" name="장식"/>
-          <p:cNvSpPr/>
-          <p:nvPr/>
-        </p:nvSpPr>
-        <p:spPr>
-          <a:xfrm>
-            <a:off x="6892061" y="1623191"/>
-            <a:ext cx="200163" cy="200163"/>
-          </a:xfrm>
-          <a:prstGeom prst="ellipse">
-            <a:avLst/>
-          </a:prstGeom>
-          <a:solidFill>
-            <a:srgbClr val="F4DBCD"/>
-          </a:solidFill>
-          <a:ln>
-            <a:noFill/>
-          </a:ln>
-        </p:spPr>
-        <p:txBody>
-          <a:bodyPr rtlCol="0" anchor="ctr"/>
-          <a:lstStyle/>
-          <a:p>
-            <a:pPr algn="ctr"/>
-          </a:p>
-        </p:txBody>
-      </p:sp>
-      <p:sp>
-        <p:nvSpPr>
-          <p:cNvPr id="7" name="장식"/>
-          <p:cNvSpPr/>
-          <p:nvPr/>
-        </p:nvSpPr>
-        <p:spPr>
-          <a:xfrm>
-            <a:off x="5120089" y="1161505"/>
-            <a:ext cx="263527" cy="263527"/>
-          </a:xfrm>
-          <a:prstGeom prst="ellipse">
-            <a:avLst/>
-          </a:prstGeom>
-          <a:solidFill>
-            <a:srgbClr val="3B9185"/>
-          </a:solidFill>
-          <a:ln>
-            <a:noFill/>
-          </a:ln>
-        </p:spPr>
-        <p:txBody>
-          <a:bodyPr rtlCol="0" anchor="ctr"/>
-          <a:lstStyle/>
-          <a:p>
-            <a:pPr algn="ctr"/>
-          </a:p>
-        </p:txBody>
-      </p:sp>
-      <p:sp>
-        <p:nvSpPr>
-          <p:cNvPr id="8" name="장식"/>
-          <p:cNvSpPr/>
-          <p:nvPr/>
-        </p:nvSpPr>
-        <p:spPr>
-          <a:xfrm>
-            <a:off x="6364859" y="758859"/>
-            <a:ext cx="216496" cy="216496"/>
-          </a:xfrm>
-          <a:prstGeom prst="ellipse">
-            <a:avLst/>
-          </a:prstGeom>
-          <a:solidFill>
-            <a:srgbClr val="995229"/>
-          </a:solidFill>
-          <a:ln>
-            <a:noFill/>
-          </a:ln>
-        </p:spPr>
-        <p:txBody>
-          <a:bodyPr rtlCol="0" anchor="ctr"/>
-          <a:lstStyle/>
-          <a:p>
-            <a:pPr algn="ctr"/>
-          </a:p>
-        </p:txBody>
-      </p:sp>
-      <p:sp>
-        <p:nvSpPr>
-          <p:cNvPr id="9" name="장식"/>
-          <p:cNvSpPr/>
-          <p:nvPr/>
-        </p:nvSpPr>
-        <p:spPr>
-          <a:xfrm>
-            <a:off x="6068545" y="360190"/>
-            <a:ext cx="334832" cy="334832"/>
-          </a:xfrm>
-          <a:prstGeom prst="ellipse">
-            <a:avLst/>
-          </a:prstGeom>
-          <a:solidFill>
-            <a:srgbClr val="F4DBCD"/>
-          </a:solidFill>
-          <a:ln>
-            <a:noFill/>
-          </a:ln>
-        </p:spPr>
-        <p:txBody>
-          <a:bodyPr rtlCol="0" anchor="ctr"/>
-          <a:lstStyle/>
-          <a:p>
-            <a:pPr algn="ctr"/>
-          </a:p>
-        </p:txBody>
-      </p:sp>
-      <p:sp>
-        <p:nvSpPr>
-          <p:cNvPr id="10" name="장식"/>
-          <p:cNvSpPr/>
-          <p:nvPr/>
-        </p:nvSpPr>
-        <p:spPr>
-          <a:xfrm>
-            <a:off x="5437401" y="825259"/>
-            <a:ext cx="143688" cy="143688"/>
-          </a:xfrm>
-          <a:prstGeom prst="ellipse">
-            <a:avLst/>
-          </a:prstGeom>
-          <a:solidFill>
-            <a:srgbClr val="3B9185"/>
-          </a:solidFill>
-          <a:ln>
-            <a:noFill/>
-          </a:ln>
-        </p:spPr>
-        <p:txBody>
-          <a:bodyPr rtlCol="0" anchor="ctr"/>
-          <a:lstStyle/>
-          <a:p>
-            <a:pPr algn="ctr"/>
-          </a:p>
-        </p:txBody>
-      </p:sp>
-      <p:sp>
-        <p:nvSpPr>
-          <p:cNvPr id="11" name="장식"/>
-          <p:cNvSpPr/>
-          <p:nvPr/>
-        </p:nvSpPr>
-        <p:spPr>
-          <a:xfrm>
-            <a:off x="6550618" y="2104327"/>
-            <a:ext cx="285402" cy="285402"/>
-          </a:xfrm>
-          <a:prstGeom prst="ellipse">
-            <a:avLst/>
-          </a:prstGeom>
-          <a:solidFill>
-            <a:srgbClr val="995229"/>
-          </a:solidFill>
-          <a:ln>
-            <a:noFill/>
-          </a:ln>
-        </p:spPr>
-        <p:txBody>
-          <a:bodyPr rtlCol="0" anchor="ctr"/>
-          <a:lstStyle/>
-          <a:p>
-            <a:pPr algn="ctr"/>
-          </a:p>
-        </p:txBody>
-      </p:sp>
-      <p:sp>
-        <p:nvSpPr>
-          <p:cNvPr id="12" name="장식"/>
-          <p:cNvSpPr/>
-          <p:nvPr/>
-        </p:nvSpPr>
-        <p:spPr>
-          <a:xfrm>
-            <a:off x="6115670" y="917740"/>
-            <a:ext cx="267797" cy="267797"/>
-          </a:xfrm>
-          <a:prstGeom prst="ellipse">
-            <a:avLst/>
-          </a:prstGeom>
-          <a:solidFill>
-            <a:srgbClr val="F4DBCD"/>
-          </a:solidFill>
-          <a:ln>
-            <a:noFill/>
-          </a:ln>
-        </p:spPr>
-        <p:txBody>
-          <a:bodyPr rtlCol="0" anchor="ctr"/>
-          <a:lstStyle/>
-          <a:p>
-            <a:pPr algn="ctr"/>
-          </a:p>
-        </p:txBody>
-      </p:sp>
-      <p:sp>
-        <p:nvSpPr>
-          <p:cNvPr id="13" name="장식"/>
-          <p:cNvSpPr/>
-          <p:nvPr/>
-        </p:nvSpPr>
-        <p:spPr>
-          <a:xfrm>
-            <a:off x="6642241" y="1444838"/>
-            <a:ext cx="284342" cy="284342"/>
-          </a:xfrm>
-          <a:prstGeom prst="ellipse">
-            <a:avLst/>
-          </a:prstGeom>
-          <a:solidFill>
-            <a:srgbClr val="3B9185"/>
-          </a:solidFill>
-          <a:ln>
-            <a:noFill/>
-          </a:ln>
-        </p:spPr>
-        <p:txBody>
-          <a:bodyPr rtlCol="0" anchor="ctr"/>
-          <a:lstStyle/>
-          <a:p>
-            <a:pPr algn="ctr"/>
-          </a:p>
-        </p:txBody>
-      </p:sp>
-      <p:sp>
-        <p:nvSpPr>
-          <p:cNvPr id="14" name="장식"/>
-          <p:cNvSpPr/>
-          <p:nvPr/>
-        </p:nvSpPr>
-        <p:spPr>
-          <a:xfrm>
-            <a:off x="5561757" y="750724"/>
-            <a:ext cx="180660" cy="180660"/>
-          </a:xfrm>
-          <a:prstGeom prst="ellipse">
-            <a:avLst/>
-          </a:prstGeom>
-          <a:solidFill>
-            <a:srgbClr val="995229"/>
-          </a:solidFill>
-          <a:ln>
-            <a:noFill/>
-          </a:ln>
-        </p:spPr>
-        <p:txBody>
-          <a:bodyPr rtlCol="0" anchor="ctr"/>
-          <a:lstStyle/>
-          <a:p>
-            <a:pPr algn="ctr"/>
-          </a:p>
-        </p:txBody>
-      </p:sp>
-      <p:sp>
-        <p:nvSpPr>
-          <p:cNvPr id="15" name="장식"/>
-          <p:cNvSpPr/>
-          <p:nvPr/>
-        </p:nvSpPr>
-        <p:spPr>
-          <a:xfrm>
-            <a:off x="5279103" y="941758"/>
-            <a:ext cx="124614" cy="124614"/>
-          </a:xfrm>
-          <a:prstGeom prst="ellipse">
-            <a:avLst/>
-          </a:prstGeom>
-          <a:solidFill>
-            <a:srgbClr val="F4DBCD"/>
-          </a:solidFill>
-          <a:ln>
-            <a:noFill/>
-          </a:ln>
-        </p:spPr>
-        <p:txBody>
-          <a:bodyPr rtlCol="0" anchor="ctr"/>
-          <a:lstStyle/>
-          <a:p>
-            <a:pPr algn="ctr"/>
-          </a:p>
-        </p:txBody>
-      </p:sp>
+        </p:spPr>
+      </p:pic>
       <p:sp>
         <p:nvSpPr>
           <p:cNvPr id="2" name="Title 1"/>
@@ -7901,8 +5903,8 @@
         </p:nvSpPr>
         <p:spPr>
           <a:xfrm>
-            <a:off x="1463003" y="2331720"/>
-            <a:ext cx="9265688" cy="1371600"/>
+            <a:off x="853418" y="2057400"/>
+            <a:ext cx="6095847" cy="1554480"/>
           </a:xfrm>
         </p:spPr>
         <p:txBody>
@@ -7911,7 +5913,7 @@
           </a:bodyPr>
           <a:lstStyle/>
           <a:p>
-            <a:pPr algn="ctr">
+            <a:pPr algn="l">
               <a:lnSpc>
                 <a:spcPct val="105000"/>
               </a:lnSpc>
@@ -7922,21 +5924,21 @@
                   <a:srgbClr val="492713"/>
                 </a:solidFill>
               </a:rPr>
-              <a:t>함께해 주셔서 감사합니다</a:t>
-            </a:r>
-          </a:p>
-        </p:txBody>
-      </p:sp>
-      <p:sp>
-        <p:nvSpPr>
-          <p:cNvPr id="16" name="한 줄 문구"/>
+              <a:t>와 주셔서 고맙습니다</a:t>
+            </a:r>
+          </a:p>
+        </p:txBody>
+      </p:sp>
+      <p:sp>
+        <p:nvSpPr>
+          <p:cNvPr id="4" name="한 줄 문구"/>
           <p:cNvSpPr txBox="1"/>
           <p:nvPr/>
         </p:nvSpPr>
         <p:spPr>
           <a:xfrm>
-            <a:off x="1463003" y="3794760"/>
-            <a:ext cx="9265688" cy="822960"/>
+            <a:off x="853418" y="3749039"/>
+            <a:ext cx="6095847" cy="822960"/>
           </a:xfrm>
           <a:prstGeom prst="rect">
             <a:avLst/>
@@ -7949,7 +5951,7 @@
           </a:bodyPr>
           <a:lstStyle/>
           <a:p>
-            <a:pPr algn="ctr">
+            <a:pPr algn="l">
               <a:lnSpc>
                 <a:spcPct val="115000"/>
               </a:lnSpc>
@@ -7960,21 +5962,21 @@
                   <a:srgbClr val="492713"/>
                 </a:solidFill>
               </a:rPr>
-              <a:t>오늘의 축복을 오래도록 간직하겠습니다</a:t>
-            </a:r>
-          </a:p>
-        </p:txBody>
-      </p:sp>
-      <p:sp>
-        <p:nvSpPr>
-          <p:cNvPr id="17" name="안내 문구"/>
+              <a:t>잘 살겠습니다</a:t>
+            </a:r>
+          </a:p>
+        </p:txBody>
+      </p:sp>
+      <p:sp>
+        <p:nvSpPr>
+          <p:cNvPr id="5" name="안내 문구"/>
           <p:cNvSpPr txBox="1"/>
           <p:nvPr/>
         </p:nvSpPr>
         <p:spPr>
           <a:xfrm>
-            <a:off x="1463003" y="4663440"/>
-            <a:ext cx="9265688" cy="914400"/>
+            <a:off x="853418" y="4617720"/>
+            <a:ext cx="6095847" cy="914400"/>
           </a:xfrm>
           <a:prstGeom prst="rect">
             <a:avLst/>
@@ -7987,7 +5989,7 @@
           </a:bodyPr>
           <a:lstStyle/>
           <a:p>
-            <a:pPr algn="ctr">
+            <a:pPr algn="l">
               <a:lnSpc>
                 <a:spcPct val="115000"/>
               </a:lnSpc>

--- a/public/fun/pack/pptx/wedding/결혼식_38_식순중심_군고구마골목.pptx
+++ b/public/fun/pack/pptx/wedding/결혼식_38_식순중심_군고구마골목.pptx
@@ -3286,6 +3286,14 @@
 <file path=ppt/slides/slide1.xml><?xml version="1.0" encoding="utf-8"?>
 <p:sld xmlns:a="http://schemas.openxmlformats.org/drawingml/2006/main" xmlns:p="http://schemas.openxmlformats.org/presentationml/2006/main" xmlns:r="http://schemas.openxmlformats.org/officeDocument/2006/relationships">
   <p:cSld>
+    <p:bg>
+      <p:bgPr>
+        <a:solidFill>
+          <a:srgbClr val="F6E1D5"/>
+        </a:solidFill>
+        <a:effectLst/>
+      </p:bgPr>
+    </p:bg>
     <p:spTree>
       <p:nvGrpSpPr>
         <p:cNvPr id="1" name=""/>
@@ -3293,30 +3301,116 @@
         <p:nvPr/>
       </p:nvGrpSpPr>
       <p:grpSpPr/>
-      <p:pic>
-        <p:nvPicPr>
-          <p:cNvPr id="3" name="표지 그림" descr="wedding-38.jpg"/>
-          <p:cNvPicPr>
-            <a:picLocks noChangeAspect="1"/>
-          </p:cNvPicPr>
+      <p:sp>
+        <p:nvSpPr>
+          <p:cNvPr id="3" name="사진 자리"/>
+          <p:cNvSpPr/>
           <p:nvPr/>
-        </p:nvPicPr>
-        <p:blipFill>
-          <a:blip r:embed="rId2"/>
-          <a:stretch>
-            <a:fillRect/>
-          </a:stretch>
-        </p:blipFill>
-        <p:spPr>
-          <a:xfrm>
-            <a:off x="0" y="0"/>
-            <a:ext cx="12191695" cy="6858000"/>
+        </p:nvSpPr>
+        <p:spPr>
+          <a:xfrm>
+            <a:off x="7802684" y="0"/>
+            <a:ext cx="4389010" cy="6858000"/>
           </a:xfrm>
           <a:prstGeom prst="rect">
             <a:avLst/>
           </a:prstGeom>
-        </p:spPr>
-      </p:pic>
+          <a:solidFill>
+            <a:srgbClr val="EBC4AD"/>
+          </a:solidFill>
+          <a:ln>
+            <a:noFill/>
+          </a:ln>
+        </p:spPr>
+        <p:txBody>
+          <a:bodyPr rtlCol="0" anchor="ctr" wrap="square" lIns="54864" rIns="54864" tIns="27432" bIns="27432">
+            <a:noAutofit/>
+          </a:bodyPr>
+          <a:lstStyle/>
+          <a:p>
+            <a:pPr algn="ctr">
+              <a:lnSpc>
+                <a:spcPct val="100000"/>
+              </a:lnSpc>
+            </a:pPr>
+            <a:r>
+              <a:rPr sz="1400" b="0" i="0">
+                <a:solidFill>
+                  <a:srgbClr val="493427"/>
+                </a:solidFill>
+              </a:rPr>
+              <a:t>사진을 넣어 주세요</a:t>
+            </a:r>
+          </a:p>
+        </p:txBody>
+      </p:sp>
+      <p:sp>
+        <p:nvSpPr>
+          <p:cNvPr id="4" name="장식"/>
+          <p:cNvSpPr/>
+          <p:nvPr/>
+        </p:nvSpPr>
+        <p:spPr>
+          <a:xfrm>
+            <a:off x="8168435" y="365760"/>
+            <a:ext cx="3657508" cy="6126480"/>
+          </a:xfrm>
+          <a:prstGeom prst="rect">
+            <a:avLst/>
+          </a:prstGeom>
+          <a:noFill/>
+          <a:ln w="9525">
+            <a:solidFill>
+              <a:srgbClr val="26231F"/>
+            </a:solidFill>
+          </a:ln>
+        </p:spPr>
+        <p:txBody>
+          <a:bodyPr rtlCol="0" anchor="ctr"/>
+          <a:lstStyle/>
+          <a:p>
+            <a:pPr algn="ctr"/>
+          </a:p>
+        </p:txBody>
+      </p:sp>
+      <p:sp>
+        <p:nvSpPr>
+          <p:cNvPr id="5" name="라벨"/>
+          <p:cNvSpPr txBox="1"/>
+          <p:nvPr/>
+        </p:nvSpPr>
+        <p:spPr>
+          <a:xfrm>
+            <a:off x="822960" y="2148840"/>
+            <a:ext cx="5608179" cy="274320"/>
+          </a:xfrm>
+          <a:prstGeom prst="rect">
+            <a:avLst/>
+          </a:prstGeom>
+          <a:noFill/>
+        </p:spPr>
+        <p:txBody>
+          <a:bodyPr wrap="square" lIns="54864" rIns="54864" tIns="27432" bIns="27432" anchor="t">
+            <a:noAutofit/>
+          </a:bodyPr>
+          <a:lstStyle/>
+          <a:p>
+            <a:pPr algn="l">
+              <a:lnSpc>
+                <a:spcPct val="115000"/>
+              </a:lnSpc>
+            </a:pPr>
+            <a:r>
+              <a:rPr sz="1000" b="1" i="0" spc="250">
+                <a:solidFill>
+                  <a:srgbClr val="26231F"/>
+                </a:solidFill>
+              </a:rPr>
+              <a:t>WEDDING</a:t>
+            </a:r>
+          </a:p>
+        </p:txBody>
+      </p:sp>
       <p:sp>
         <p:nvSpPr>
           <p:cNvPr id="2" name="Title 1"/>
@@ -3329,8 +3423,8 @@
         </p:nvSpPr>
         <p:spPr>
           <a:xfrm>
-            <a:off x="853418" y="2057400"/>
-            <a:ext cx="6095847" cy="1554480"/>
+            <a:off x="822960" y="2606040"/>
+            <a:ext cx="5608179" cy="1188720"/>
           </a:xfrm>
         </p:spPr>
         <p:txBody>
@@ -3347,7 +3441,7 @@
             <a:r>
               <a:rPr sz="3600" b="1" i="0">
                 <a:solidFill>
-                  <a:srgbClr val="492713"/>
+                  <a:srgbClr val="26231F"/>
                 </a:solidFill>
               </a:rPr>
               <a:t>저희 결혼합니다</a:t>
@@ -3357,14 +3451,14 @@
       </p:sp>
       <p:sp>
         <p:nvSpPr>
-          <p:cNvPr id="4" name="한 줄 문구"/>
+          <p:cNvPr id="6" name="한 줄 문구"/>
           <p:cNvSpPr txBox="1"/>
           <p:nvPr/>
         </p:nvSpPr>
         <p:spPr>
           <a:xfrm>
-            <a:off x="853418" y="3749039"/>
-            <a:ext cx="6095847" cy="822960"/>
+            <a:off x="822960" y="3886200"/>
+            <a:ext cx="5608179" cy="822960"/>
           </a:xfrm>
           <a:prstGeom prst="rect">
             <a:avLst/>
@@ -3383,9 +3477,9 @@
               </a:lnSpc>
             </a:pPr>
             <a:r>
-              <a:rPr sz="1700" b="0" i="1">
+              <a:rPr sz="1700" b="0" i="0">
                 <a:solidFill>
-                  <a:srgbClr val="492713"/>
+                  <a:srgbClr val="26231F"/>
                 </a:solidFill>
               </a:rPr>
               <a:t>사진 촬영은 식이 끝난 뒤에 합니다</a:t>
@@ -3395,14 +3489,14 @@
       </p:sp>
       <p:sp>
         <p:nvSpPr>
-          <p:cNvPr id="5" name="안내 문구"/>
+          <p:cNvPr id="7" name="안내 문구"/>
           <p:cNvSpPr txBox="1"/>
           <p:nvPr/>
         </p:nvSpPr>
         <p:spPr>
           <a:xfrm>
-            <a:off x="853418" y="4617720"/>
-            <a:ext cx="6095847" cy="914400"/>
+            <a:off x="822960" y="4754880"/>
+            <a:ext cx="5608179" cy="914400"/>
           </a:xfrm>
           <a:prstGeom prst="rect">
             <a:avLst/>
@@ -3423,7 +3517,7 @@
             <a:r>
               <a:rPr sz="1400" b="0" i="0">
                 <a:solidFill>
-                  <a:srgbClr val="666666"/>
+                  <a:srgbClr val="26231F"/>
                 </a:solidFill>
               </a:rPr>
               <a:t>신랑 이름 ♥ 신부 이름</a:t>
@@ -3438,10 +3532,10 @@
             <a:r>
               <a:rPr sz="1400" b="0" i="0">
                 <a:solidFill>
-                  <a:srgbClr val="666666"/>
+                  <a:srgbClr val="26231F"/>
                 </a:solidFill>
               </a:rPr>
-              <a:t>2027. 00. 00 · 예식장 이름</a:t>
+              <a:t>날짜 입력 · 예식장 이름</a:t>
             </a:r>
           </a:p>
         </p:txBody>
@@ -3460,7 +3554,7 @@
     <p:bg>
       <p:bgPr>
         <a:solidFill>
-          <a:srgbClr val="FBF3EF"/>
+          <a:srgbClr val="FFFFFF"/>
         </a:solidFill>
         <a:effectLst/>
       </p:bgPr>
@@ -3480,71 +3574,100 @@
         </p:nvSpPr>
         <p:spPr>
           <a:xfrm>
-            <a:off x="256032" y="256032"/>
-            <a:ext cx="11679631" cy="6345936"/>
+            <a:off x="0" y="6565392"/>
+            <a:ext cx="12191695" cy="292608"/>
+          </a:xfrm>
+          <a:prstGeom prst="rect">
+            <a:avLst/>
+          </a:prstGeom>
+          <a:solidFill>
+            <a:srgbClr val="EBC4AD"/>
+          </a:solidFill>
+          <a:ln>
+            <a:noFill/>
+          </a:ln>
+        </p:spPr>
+        <p:txBody>
+          <a:bodyPr rtlCol="0" anchor="ctr"/>
+          <a:lstStyle/>
+          <a:p>
+            <a:pPr algn="ctr"/>
+          </a:p>
+        </p:txBody>
+      </p:sp>
+      <p:sp>
+        <p:nvSpPr>
+          <p:cNvPr id="4" name="포인트"/>
+          <p:cNvSpPr/>
+          <p:nvPr/>
+        </p:nvSpPr>
+        <p:spPr>
+          <a:xfrm>
+            <a:off x="5958687" y="246888"/>
+            <a:ext cx="274320" cy="274320"/>
+          </a:xfrm>
+          <a:prstGeom prst="moon">
+            <a:avLst/>
+          </a:prstGeom>
+          <a:solidFill>
+            <a:srgbClr val="D89C79"/>
+          </a:solidFill>
+          <a:ln>
+            <a:noFill/>
+          </a:ln>
+        </p:spPr>
+        <p:txBody>
+          <a:bodyPr rtlCol="0" anchor="ctr"/>
+          <a:lstStyle/>
+          <a:p>
+            <a:pPr algn="ctr"/>
+          </a:p>
+        </p:txBody>
+      </p:sp>
+      <p:sp>
+        <p:nvSpPr>
+          <p:cNvPr id="5" name="장식"/>
+          <p:cNvSpPr/>
+          <p:nvPr/>
+        </p:nvSpPr>
+        <p:spPr>
+          <a:xfrm>
+            <a:off x="5684367" y="1572768"/>
+            <a:ext cx="822960" cy="22860"/>
+          </a:xfrm>
+          <a:prstGeom prst="rect">
+            <a:avLst/>
+          </a:prstGeom>
+          <a:solidFill>
+            <a:srgbClr val="D89C79"/>
+          </a:solidFill>
+          <a:ln>
+            <a:noFill/>
+          </a:ln>
+        </p:spPr>
+        <p:txBody>
+          <a:bodyPr rtlCol="0" anchor="ctr"/>
+          <a:lstStyle/>
+          <a:p>
+            <a:pPr algn="ctr"/>
+          </a:p>
+        </p:txBody>
+      </p:sp>
+      <p:sp>
+        <p:nvSpPr>
+          <p:cNvPr id="6" name="상단 라벨"/>
+          <p:cNvSpPr txBox="1"/>
+          <p:nvPr/>
+        </p:nvSpPr>
+        <p:spPr>
+          <a:xfrm>
+            <a:off x="640080" y="182880"/>
+            <a:ext cx="3657600" cy="274320"/>
           </a:xfrm>
           <a:prstGeom prst="rect">
             <a:avLst/>
           </a:prstGeom>
           <a:noFill/>
-          <a:ln w="28575">
-            <a:solidFill>
-              <a:srgbClr val="995229"/>
-            </a:solidFill>
-          </a:ln>
-        </p:spPr>
-        <p:txBody>
-          <a:bodyPr rtlCol="0" anchor="ctr"/>
-          <a:lstStyle/>
-          <a:p>
-            <a:pPr algn="ctr"/>
-          </a:p>
-        </p:txBody>
-      </p:sp>
-      <p:sp>
-        <p:nvSpPr>
-          <p:cNvPr id="4" name="장식"/>
-          <p:cNvSpPr/>
-          <p:nvPr/>
-        </p:nvSpPr>
-        <p:spPr>
-          <a:xfrm>
-            <a:off x="384048" y="384048"/>
-            <a:ext cx="11423599" cy="6089904"/>
-          </a:xfrm>
-          <a:prstGeom prst="rect">
-            <a:avLst/>
-          </a:prstGeom>
-          <a:noFill/>
-          <a:ln w="9525">
-            <a:solidFill>
-              <a:srgbClr val="F4DBCD"/>
-            </a:solidFill>
-          </a:ln>
-        </p:spPr>
-        <p:txBody>
-          <a:bodyPr rtlCol="0" anchor="ctr"/>
-          <a:lstStyle/>
-          <a:p>
-            <a:pPr algn="ctr"/>
-          </a:p>
-        </p:txBody>
-      </p:sp>
-      <p:sp>
-        <p:nvSpPr>
-          <p:cNvPr id="2" name="Title 1"/>
-          <p:cNvSpPr>
-            <a:spLocks noGrp="1"/>
-          </p:cNvSpPr>
-          <p:nvPr>
-            <p:ph type="title"/>
-          </p:nvPr>
-        </p:nvSpPr>
-        <p:spPr>
-          <a:xfrm>
-            <a:off x="822960" y="548640"/>
-            <a:ext cx="9265615" cy="822960"/>
-          </a:xfrm>
         </p:spPr>
         <p:txBody>
           <a:bodyPr wrap="square" lIns="54864" rIns="54864" tIns="27432" bIns="27432" anchor="ctr">
@@ -3553,6 +3676,44 @@
           <a:lstStyle/>
           <a:p>
             <a:pPr algn="l">
+              <a:lnSpc>
+                <a:spcPct val="115000"/>
+              </a:lnSpc>
+            </a:pPr>
+            <a:r>
+              <a:rPr sz="800" b="1" i="0" spc="250">
+                <a:solidFill>
+                  <a:srgbClr val="8E8780"/>
+                </a:solidFill>
+              </a:rPr>
+              <a:t>WEDDING</a:t>
+            </a:r>
+          </a:p>
+        </p:txBody>
+      </p:sp>
+      <p:sp>
+        <p:nvSpPr>
+          <p:cNvPr id="2" name="Title 1"/>
+          <p:cNvSpPr>
+            <a:spLocks noGrp="1"/>
+          </p:cNvSpPr>
+          <p:nvPr>
+            <p:ph type="title"/>
+          </p:nvPr>
+        </p:nvSpPr>
+        <p:spPr>
+          <a:xfrm>
+            <a:off x="1371600" y="640080"/>
+            <a:ext cx="9448495" cy="868680"/>
+          </a:xfrm>
+        </p:spPr>
+        <p:txBody>
+          <a:bodyPr wrap="square" lIns="54864" rIns="54864" tIns="27432" bIns="27432" anchor="ctr">
+            <a:noAutofit/>
+          </a:bodyPr>
+          <a:lstStyle/>
+          <a:p>
+            <a:pPr algn="ctr">
               <a:lnSpc>
                 <a:spcPct val="105000"/>
               </a:lnSpc>
@@ -3560,7 +3721,7 @@
             <a:r>
               <a:rPr sz="3000" b="1" i="0">
                 <a:solidFill>
-                  <a:srgbClr val="492713"/>
+                  <a:srgbClr val="26231F"/>
                 </a:solidFill>
               </a:rPr>
               <a:t>신랑 · 신부 소개</a:t>
@@ -3570,25 +3731,23 @@
       </p:sp>
       <p:sp>
         <p:nvSpPr>
-          <p:cNvPr id="5" name="사진 자리"/>
+          <p:cNvPr id="7" name="사진 자리"/>
           <p:cNvSpPr/>
           <p:nvPr/>
         </p:nvSpPr>
         <p:spPr>
           <a:xfrm>
-            <a:off x="2076373" y="1554480"/>
-            <a:ext cx="2308860" cy="2308860"/>
+            <a:off x="2042083" y="1783080"/>
+            <a:ext cx="2194560" cy="2194560"/>
           </a:xfrm>
           <a:prstGeom prst="ellipse">
             <a:avLst/>
           </a:prstGeom>
           <a:solidFill>
-            <a:srgbClr val="F4DBCD"/>
+            <a:srgbClr val="F6E1D5"/>
           </a:solidFill>
           <a:ln w="19050">
-            <a:solidFill>
-              <a:srgbClr val="995229"/>
-            </a:solidFill>
+            <a:noFill/>
             <a:prstDash val="dash"/>
           </a:ln>
         </p:spPr>
@@ -3606,7 +3765,7 @@
             <a:r>
               <a:rPr sz="1200" b="0" i="0">
                 <a:solidFill>
-                  <a:srgbClr val="492713"/>
+                  <a:srgbClr val="8E8780"/>
                 </a:solidFill>
               </a:rPr>
               <a:t>사진</a:t>
@@ -3616,14 +3775,14 @@
       </p:sp>
       <p:sp>
         <p:nvSpPr>
-          <p:cNvPr id="6" name="TextBox 5"/>
+          <p:cNvPr id="8" name="TextBox 7"/>
           <p:cNvSpPr txBox="1"/>
           <p:nvPr/>
         </p:nvSpPr>
         <p:spPr>
           <a:xfrm>
-            <a:off x="822960" y="3954779"/>
-            <a:ext cx="4815687" cy="411480"/>
+            <a:off x="640080" y="4069079"/>
+            <a:ext cx="4998567" cy="411480"/>
           </a:xfrm>
           <a:prstGeom prst="rect">
             <a:avLst/>
@@ -3644,7 +3803,7 @@
             <a:r>
               <a:rPr sz="1600" b="1" i="0">
                 <a:solidFill>
-                  <a:srgbClr val="492713"/>
+                  <a:srgbClr val="493427"/>
                 </a:solidFill>
               </a:rPr>
               <a:t>신랑</a:t>
@@ -3654,14 +3813,14 @@
       </p:sp>
       <p:sp>
         <p:nvSpPr>
-          <p:cNvPr id="7" name="TextBox 6"/>
+          <p:cNvPr id="9" name="TextBox 8"/>
           <p:cNvSpPr txBox="1"/>
           <p:nvPr/>
         </p:nvSpPr>
         <p:spPr>
           <a:xfrm>
-            <a:off x="914400" y="4411979"/>
-            <a:ext cx="4632807" cy="1760219"/>
+            <a:off x="731519" y="4526279"/>
+            <a:ext cx="4815687" cy="1645919"/>
           </a:xfrm>
           <a:prstGeom prst="rect">
             <a:avLst/>
@@ -3722,25 +3881,23 @@
       </p:sp>
       <p:sp>
         <p:nvSpPr>
-          <p:cNvPr id="8" name="사진 자리"/>
+          <p:cNvPr id="10" name="사진 자리"/>
           <p:cNvSpPr/>
           <p:nvPr/>
         </p:nvSpPr>
         <p:spPr>
           <a:xfrm>
-            <a:off x="7806461" y="1554480"/>
-            <a:ext cx="2308860" cy="2308860"/>
+            <a:off x="7955051" y="1783080"/>
+            <a:ext cx="2194560" cy="2194560"/>
           </a:xfrm>
           <a:prstGeom prst="ellipse">
             <a:avLst/>
           </a:prstGeom>
           <a:solidFill>
-            <a:srgbClr val="F4DBCD"/>
+            <a:srgbClr val="F6E1D5"/>
           </a:solidFill>
           <a:ln w="19050">
-            <a:solidFill>
-              <a:srgbClr val="995229"/>
-            </a:solidFill>
+            <a:noFill/>
             <a:prstDash val="dash"/>
           </a:ln>
         </p:spPr>
@@ -3758,7 +3915,7 @@
             <a:r>
               <a:rPr sz="1200" b="0" i="0">
                 <a:solidFill>
-                  <a:srgbClr val="492713"/>
+                  <a:srgbClr val="8E8780"/>
                 </a:solidFill>
               </a:rPr>
               <a:t>사진</a:t>
@@ -3768,14 +3925,14 @@
       </p:sp>
       <p:sp>
         <p:nvSpPr>
-          <p:cNvPr id="9" name="TextBox 8"/>
+          <p:cNvPr id="11" name="TextBox 10"/>
           <p:cNvSpPr txBox="1"/>
           <p:nvPr/>
         </p:nvSpPr>
         <p:spPr>
           <a:xfrm>
-            <a:off x="6553047" y="3954779"/>
-            <a:ext cx="4815687" cy="411480"/>
+            <a:off x="6553047" y="4069079"/>
+            <a:ext cx="4998567" cy="411480"/>
           </a:xfrm>
           <a:prstGeom prst="rect">
             <a:avLst/>
@@ -3796,7 +3953,7 @@
             <a:r>
               <a:rPr sz="1600" b="1" i="0">
                 <a:solidFill>
-                  <a:srgbClr val="492713"/>
+                  <a:srgbClr val="493427"/>
                 </a:solidFill>
               </a:rPr>
               <a:t>신부</a:t>
@@ -3806,14 +3963,14 @@
       </p:sp>
       <p:sp>
         <p:nvSpPr>
-          <p:cNvPr id="10" name="TextBox 9"/>
+          <p:cNvPr id="12" name="TextBox 11"/>
           <p:cNvSpPr txBox="1"/>
           <p:nvPr/>
         </p:nvSpPr>
         <p:spPr>
           <a:xfrm>
-            <a:off x="6644487" y="4411979"/>
-            <a:ext cx="4632807" cy="1760219"/>
+            <a:off x="6644487" y="4526279"/>
+            <a:ext cx="4815687" cy="1645919"/>
           </a:xfrm>
           <a:prstGeom prst="rect">
             <a:avLst/>
@@ -3886,7 +4043,7 @@
     <p:bg>
       <p:bgPr>
         <a:solidFill>
-          <a:srgbClr val="FBF3EF"/>
+          <a:srgbClr val="FFFFFF"/>
         </a:solidFill>
         <a:effectLst/>
       </p:bgPr>
@@ -3906,71 +4063,100 @@
         </p:nvSpPr>
         <p:spPr>
           <a:xfrm>
-            <a:off x="256032" y="256032"/>
-            <a:ext cx="11679631" cy="6345936"/>
+            <a:off x="0" y="6565392"/>
+            <a:ext cx="12191695" cy="292608"/>
+          </a:xfrm>
+          <a:prstGeom prst="rect">
+            <a:avLst/>
+          </a:prstGeom>
+          <a:solidFill>
+            <a:srgbClr val="EBC4AD"/>
+          </a:solidFill>
+          <a:ln>
+            <a:noFill/>
+          </a:ln>
+        </p:spPr>
+        <p:txBody>
+          <a:bodyPr rtlCol="0" anchor="ctr"/>
+          <a:lstStyle/>
+          <a:p>
+            <a:pPr algn="ctr"/>
+          </a:p>
+        </p:txBody>
+      </p:sp>
+      <p:sp>
+        <p:nvSpPr>
+          <p:cNvPr id="4" name="포인트"/>
+          <p:cNvSpPr/>
+          <p:nvPr/>
+        </p:nvSpPr>
+        <p:spPr>
+          <a:xfrm>
+            <a:off x="5958687" y="246888"/>
+            <a:ext cx="274320" cy="274320"/>
+          </a:xfrm>
+          <a:prstGeom prst="moon">
+            <a:avLst/>
+          </a:prstGeom>
+          <a:solidFill>
+            <a:srgbClr val="D89C79"/>
+          </a:solidFill>
+          <a:ln>
+            <a:noFill/>
+          </a:ln>
+        </p:spPr>
+        <p:txBody>
+          <a:bodyPr rtlCol="0" anchor="ctr"/>
+          <a:lstStyle/>
+          <a:p>
+            <a:pPr algn="ctr"/>
+          </a:p>
+        </p:txBody>
+      </p:sp>
+      <p:sp>
+        <p:nvSpPr>
+          <p:cNvPr id="5" name="장식"/>
+          <p:cNvSpPr/>
+          <p:nvPr/>
+        </p:nvSpPr>
+        <p:spPr>
+          <a:xfrm>
+            <a:off x="5684367" y="1572768"/>
+            <a:ext cx="822960" cy="22860"/>
+          </a:xfrm>
+          <a:prstGeom prst="rect">
+            <a:avLst/>
+          </a:prstGeom>
+          <a:solidFill>
+            <a:srgbClr val="D89C79"/>
+          </a:solidFill>
+          <a:ln>
+            <a:noFill/>
+          </a:ln>
+        </p:spPr>
+        <p:txBody>
+          <a:bodyPr rtlCol="0" anchor="ctr"/>
+          <a:lstStyle/>
+          <a:p>
+            <a:pPr algn="ctr"/>
+          </a:p>
+        </p:txBody>
+      </p:sp>
+      <p:sp>
+        <p:nvSpPr>
+          <p:cNvPr id="6" name="상단 라벨"/>
+          <p:cNvSpPr txBox="1"/>
+          <p:nvPr/>
+        </p:nvSpPr>
+        <p:spPr>
+          <a:xfrm>
+            <a:off x="640080" y="182880"/>
+            <a:ext cx="3657600" cy="274320"/>
           </a:xfrm>
           <a:prstGeom prst="rect">
             <a:avLst/>
           </a:prstGeom>
           <a:noFill/>
-          <a:ln w="28575">
-            <a:solidFill>
-              <a:srgbClr val="995229"/>
-            </a:solidFill>
-          </a:ln>
-        </p:spPr>
-        <p:txBody>
-          <a:bodyPr rtlCol="0" anchor="ctr"/>
-          <a:lstStyle/>
-          <a:p>
-            <a:pPr algn="ctr"/>
-          </a:p>
-        </p:txBody>
-      </p:sp>
-      <p:sp>
-        <p:nvSpPr>
-          <p:cNvPr id="4" name="장식"/>
-          <p:cNvSpPr/>
-          <p:nvPr/>
-        </p:nvSpPr>
-        <p:spPr>
-          <a:xfrm>
-            <a:off x="384048" y="384048"/>
-            <a:ext cx="11423599" cy="6089904"/>
-          </a:xfrm>
-          <a:prstGeom prst="rect">
-            <a:avLst/>
-          </a:prstGeom>
-          <a:noFill/>
-          <a:ln w="9525">
-            <a:solidFill>
-              <a:srgbClr val="F4DBCD"/>
-            </a:solidFill>
-          </a:ln>
-        </p:spPr>
-        <p:txBody>
-          <a:bodyPr rtlCol="0" anchor="ctr"/>
-          <a:lstStyle/>
-          <a:p>
-            <a:pPr algn="ctr"/>
-          </a:p>
-        </p:txBody>
-      </p:sp>
-      <p:sp>
-        <p:nvSpPr>
-          <p:cNvPr id="2" name="Title 1"/>
-          <p:cNvSpPr>
-            <a:spLocks noGrp="1"/>
-          </p:cNvSpPr>
-          <p:nvPr>
-            <p:ph type="title"/>
-          </p:nvPr>
-        </p:nvSpPr>
-        <p:spPr>
-          <a:xfrm>
-            <a:off x="822960" y="548640"/>
-            <a:ext cx="9265615" cy="822960"/>
-          </a:xfrm>
         </p:spPr>
         <p:txBody>
           <a:bodyPr wrap="square" lIns="54864" rIns="54864" tIns="27432" bIns="27432" anchor="ctr">
@@ -3979,6 +4165,44 @@
           <a:lstStyle/>
           <a:p>
             <a:pPr algn="l">
+              <a:lnSpc>
+                <a:spcPct val="115000"/>
+              </a:lnSpc>
+            </a:pPr>
+            <a:r>
+              <a:rPr sz="800" b="1" i="0" spc="250">
+                <a:solidFill>
+                  <a:srgbClr val="8E8780"/>
+                </a:solidFill>
+              </a:rPr>
+              <a:t>WEDDING</a:t>
+            </a:r>
+          </a:p>
+        </p:txBody>
+      </p:sp>
+      <p:sp>
+        <p:nvSpPr>
+          <p:cNvPr id="2" name="Title 1"/>
+          <p:cNvSpPr>
+            <a:spLocks noGrp="1"/>
+          </p:cNvSpPr>
+          <p:nvPr>
+            <p:ph type="title"/>
+          </p:nvPr>
+        </p:nvSpPr>
+        <p:spPr>
+          <a:xfrm>
+            <a:off x="1371600" y="640080"/>
+            <a:ext cx="9448495" cy="868680"/>
+          </a:xfrm>
+        </p:spPr>
+        <p:txBody>
+          <a:bodyPr wrap="square" lIns="54864" rIns="54864" tIns="27432" bIns="27432" anchor="ctr">
+            <a:noAutofit/>
+          </a:bodyPr>
+          <a:lstStyle/>
+          <a:p>
+            <a:pPr algn="ctr">
               <a:lnSpc>
                 <a:spcPct val="105000"/>
               </a:lnSpc>
@@ -3986,7 +4210,7 @@
             <a:r>
               <a:rPr sz="3000" b="1" i="0">
                 <a:solidFill>
-                  <a:srgbClr val="492713"/>
+                  <a:srgbClr val="26231F"/>
                 </a:solidFill>
               </a:rPr>
               <a:t>식순 안내</a:t>
@@ -3996,15 +4220,15 @@
       </p:sp>
       <p:graphicFrame>
         <p:nvGraphicFramePr>
-          <p:cNvPr id="5" name="표"/>
+          <p:cNvPr id="7" name="표"/>
           <p:cNvGraphicFramePr>
             <a:graphicFrameLocks noGrp="1"/>
           </p:cNvGraphicFramePr>
           <p:nvPr/>
         </p:nvGraphicFramePr>
         <p:xfrm>
-          <a:off x="822960" y="1554480"/>
-          <a:ext cx="10545775" cy="3950208"/>
+          <a:off x="640080" y="1783080"/>
+          <a:ext cx="10911535" cy="3950208"/>
         </p:xfrm>
         <a:graphic>
           <a:graphicData uri="http://schemas.openxmlformats.org/drawingml/2006/table">
@@ -4014,8 +4238,8 @@
               </a:tblPr>
               <a:tblGrid>
                 <a:gridCol w="2011680"/>
-                <a:gridCol w="5120457"/>
-                <a:gridCol w="3413638"/>
+                <a:gridCol w="5339913"/>
+                <a:gridCol w="3559942"/>
               </a:tblGrid>
               <a:tr h="658368">
                 <a:tc>
@@ -4027,7 +4251,7 @@
                       <a:r>
                         <a:rPr sz="1500" b="1">
                           <a:solidFill>
-                            <a:srgbClr val="FFFFFF"/>
+                            <a:srgbClr val="26231F"/>
                           </a:solidFill>
                         </a:rPr>
                         <a:t>시간</a:t>
@@ -4037,30 +4261,30 @@
                   <a:tcPr anchor="ctr" marL="73152" marR="73152">
                     <a:lnL w="9525" cap="flat" cmpd="sng" algn="ctr">
                       <a:solidFill>
-                        <a:srgbClr val="995229"/>
+                        <a:srgbClr val="D89C79"/>
                       </a:solidFill>
                       <a:prstDash val="solid"/>
                     </a:lnL>
                     <a:lnR w="9525" cap="flat" cmpd="sng" algn="ctr">
                       <a:solidFill>
-                        <a:srgbClr val="995229"/>
+                        <a:srgbClr val="D89C79"/>
                       </a:solidFill>
                       <a:prstDash val="solid"/>
                     </a:lnR>
                     <a:lnT w="9525" cap="flat" cmpd="sng" algn="ctr">
                       <a:solidFill>
-                        <a:srgbClr val="995229"/>
+                        <a:srgbClr val="D89C79"/>
                       </a:solidFill>
                       <a:prstDash val="solid"/>
                     </a:lnT>
                     <a:lnB w="9525" cap="flat" cmpd="sng" algn="ctr">
                       <a:solidFill>
-                        <a:srgbClr val="995229"/>
+                        <a:srgbClr val="D89C79"/>
                       </a:solidFill>
                       <a:prstDash val="solid"/>
                     </a:lnB>
                     <a:solidFill>
-                      <a:srgbClr val="995229"/>
+                      <a:srgbClr val="D89C79"/>
                     </a:solidFill>
                   </a:tcPr>
                 </a:tc>
@@ -4073,7 +4297,7 @@
                       <a:r>
                         <a:rPr sz="1500" b="1">
                           <a:solidFill>
-                            <a:srgbClr val="FFFFFF"/>
+                            <a:srgbClr val="26231F"/>
                           </a:solidFill>
                         </a:rPr>
                         <a:t>순서</a:t>
@@ -4083,30 +4307,30 @@
                   <a:tcPr anchor="ctr" marL="73152" marR="73152">
                     <a:lnL w="9525" cap="flat" cmpd="sng" algn="ctr">
                       <a:solidFill>
-                        <a:srgbClr val="995229"/>
+                        <a:srgbClr val="D89C79"/>
                       </a:solidFill>
                       <a:prstDash val="solid"/>
                     </a:lnL>
                     <a:lnR w="9525" cap="flat" cmpd="sng" algn="ctr">
                       <a:solidFill>
-                        <a:srgbClr val="995229"/>
+                        <a:srgbClr val="D89C79"/>
                       </a:solidFill>
                       <a:prstDash val="solid"/>
                     </a:lnR>
                     <a:lnT w="9525" cap="flat" cmpd="sng" algn="ctr">
                       <a:solidFill>
-                        <a:srgbClr val="995229"/>
+                        <a:srgbClr val="D89C79"/>
                       </a:solidFill>
                       <a:prstDash val="solid"/>
                     </a:lnT>
                     <a:lnB w="9525" cap="flat" cmpd="sng" algn="ctr">
                       <a:solidFill>
-                        <a:srgbClr val="995229"/>
+                        <a:srgbClr val="D89C79"/>
                       </a:solidFill>
                       <a:prstDash val="solid"/>
                     </a:lnB>
                     <a:solidFill>
-                      <a:srgbClr val="995229"/>
+                      <a:srgbClr val="D89C79"/>
                     </a:solidFill>
                   </a:tcPr>
                 </a:tc>
@@ -4119,7 +4343,7 @@
                       <a:r>
                         <a:rPr sz="1500" b="1">
                           <a:solidFill>
-                            <a:srgbClr val="FFFFFF"/>
+                            <a:srgbClr val="26231F"/>
                           </a:solidFill>
                         </a:rPr>
                         <a:t>담당</a:t>
@@ -4129,30 +4353,30 @@
                   <a:tcPr anchor="ctr" marL="73152" marR="73152">
                     <a:lnL w="9525" cap="flat" cmpd="sng" algn="ctr">
                       <a:solidFill>
-                        <a:srgbClr val="995229"/>
+                        <a:srgbClr val="D89C79"/>
                       </a:solidFill>
                       <a:prstDash val="solid"/>
                     </a:lnL>
                     <a:lnR w="9525" cap="flat" cmpd="sng" algn="ctr">
                       <a:solidFill>
-                        <a:srgbClr val="995229"/>
+                        <a:srgbClr val="D89C79"/>
                       </a:solidFill>
                       <a:prstDash val="solid"/>
                     </a:lnR>
                     <a:lnT w="9525" cap="flat" cmpd="sng" algn="ctr">
                       <a:solidFill>
-                        <a:srgbClr val="995229"/>
+                        <a:srgbClr val="D89C79"/>
                       </a:solidFill>
                       <a:prstDash val="solid"/>
                     </a:lnT>
                     <a:lnB w="9525" cap="flat" cmpd="sng" algn="ctr">
                       <a:solidFill>
-                        <a:srgbClr val="995229"/>
+                        <a:srgbClr val="D89C79"/>
                       </a:solidFill>
                       <a:prstDash val="solid"/>
                     </a:lnB>
                     <a:solidFill>
-                      <a:srgbClr val="995229"/>
+                      <a:srgbClr val="D89C79"/>
                     </a:solidFill>
                   </a:tcPr>
                 </a:tc>
@@ -4167,7 +4391,7 @@
                       <a:r>
                         <a:rPr sz="1500" b="1">
                           <a:solidFill>
-                            <a:srgbClr val="492713"/>
+                            <a:srgbClr val="493427"/>
                           </a:solidFill>
                         </a:rPr>
                         <a:t>00:00</a:t>
@@ -4177,30 +4401,30 @@
                   <a:tcPr anchor="ctr" marL="73152" marR="73152">
                     <a:lnL w="9525" cap="flat" cmpd="sng" algn="ctr">
                       <a:solidFill>
-                        <a:srgbClr val="F4DBCD"/>
+                        <a:srgbClr val="F6E1D5"/>
                       </a:solidFill>
                       <a:prstDash val="solid"/>
                     </a:lnL>
                     <a:lnR w="9525" cap="flat" cmpd="sng" algn="ctr">
                       <a:solidFill>
-                        <a:srgbClr val="F4DBCD"/>
+                        <a:srgbClr val="F6E1D5"/>
                       </a:solidFill>
                       <a:prstDash val="solid"/>
                     </a:lnR>
                     <a:lnT w="9525" cap="flat" cmpd="sng" algn="ctr">
                       <a:solidFill>
-                        <a:srgbClr val="F4DBCD"/>
+                        <a:srgbClr val="F6E1D5"/>
                       </a:solidFill>
                       <a:prstDash val="solid"/>
                     </a:lnT>
                     <a:lnB w="9525" cap="flat" cmpd="sng" algn="ctr">
                       <a:solidFill>
-                        <a:srgbClr val="F4DBCD"/>
+                        <a:srgbClr val="F6E1D5"/>
                       </a:solidFill>
                       <a:prstDash val="solid"/>
                     </a:lnB>
                     <a:solidFill>
-                      <a:srgbClr val="F4DBCD"/>
+                      <a:srgbClr val="F6E1D5"/>
                     </a:solidFill>
                   </a:tcPr>
                 </a:tc>
@@ -4213,7 +4437,7 @@
                       <a:r>
                         <a:rPr sz="1500" b="0">
                           <a:solidFill>
-                            <a:srgbClr val="2B2B2B"/>
+                            <a:srgbClr val="26231F"/>
                           </a:solidFill>
                         </a:rPr>
                         <a:t>하객 맞이</a:t>
@@ -4223,25 +4447,25 @@
                   <a:tcPr anchor="ctr" marL="73152" marR="73152">
                     <a:lnL w="9525" cap="flat" cmpd="sng" algn="ctr">
                       <a:solidFill>
-                        <a:srgbClr val="F4DBCD"/>
+                        <a:srgbClr val="F6E1D5"/>
                       </a:solidFill>
                       <a:prstDash val="solid"/>
                     </a:lnL>
                     <a:lnR w="9525" cap="flat" cmpd="sng" algn="ctr">
                       <a:solidFill>
-                        <a:srgbClr val="F4DBCD"/>
+                        <a:srgbClr val="F6E1D5"/>
                       </a:solidFill>
                       <a:prstDash val="solid"/>
                     </a:lnR>
                     <a:lnT w="9525" cap="flat" cmpd="sng" algn="ctr">
                       <a:solidFill>
-                        <a:srgbClr val="F4DBCD"/>
+                        <a:srgbClr val="F6E1D5"/>
                       </a:solidFill>
                       <a:prstDash val="solid"/>
                     </a:lnT>
                     <a:lnB w="9525" cap="flat" cmpd="sng" algn="ctr">
                       <a:solidFill>
-                        <a:srgbClr val="F4DBCD"/>
+                        <a:srgbClr val="F6E1D5"/>
                       </a:solidFill>
                       <a:prstDash val="solid"/>
                     </a:lnB>
@@ -4259,7 +4483,7 @@
                       <a:r>
                         <a:rPr sz="1500" b="0">
                           <a:solidFill>
-                            <a:srgbClr val="2B2B2B"/>
+                            <a:srgbClr val="26231F"/>
                           </a:solidFill>
                         </a:rPr>
                         <a:t/>
@@ -4269,25 +4493,25 @@
                   <a:tcPr anchor="ctr" marL="73152" marR="73152">
                     <a:lnL w="9525" cap="flat" cmpd="sng" algn="ctr">
                       <a:solidFill>
-                        <a:srgbClr val="F4DBCD"/>
+                        <a:srgbClr val="F6E1D5"/>
                       </a:solidFill>
                       <a:prstDash val="solid"/>
                     </a:lnL>
                     <a:lnR w="9525" cap="flat" cmpd="sng" algn="ctr">
                       <a:solidFill>
-                        <a:srgbClr val="F4DBCD"/>
+                        <a:srgbClr val="F6E1D5"/>
                       </a:solidFill>
                       <a:prstDash val="solid"/>
                     </a:lnR>
                     <a:lnT w="9525" cap="flat" cmpd="sng" algn="ctr">
                       <a:solidFill>
-                        <a:srgbClr val="F4DBCD"/>
+                        <a:srgbClr val="F6E1D5"/>
                       </a:solidFill>
                       <a:prstDash val="solid"/>
                     </a:lnT>
                     <a:lnB w="9525" cap="flat" cmpd="sng" algn="ctr">
                       <a:solidFill>
-                        <a:srgbClr val="F4DBCD"/>
+                        <a:srgbClr val="F6E1D5"/>
                       </a:solidFill>
                       <a:prstDash val="solid"/>
                     </a:lnB>
@@ -4307,7 +4531,7 @@
                       <a:r>
                         <a:rPr sz="1500" b="1">
                           <a:solidFill>
-                            <a:srgbClr val="492713"/>
+                            <a:srgbClr val="493427"/>
                           </a:solidFill>
                         </a:rPr>
                         <a:t>00:00</a:t>
@@ -4317,30 +4541,30 @@
                   <a:tcPr anchor="ctr" marL="73152" marR="73152">
                     <a:lnL w="9525" cap="flat" cmpd="sng" algn="ctr">
                       <a:solidFill>
-                        <a:srgbClr val="F4DBCD"/>
+                        <a:srgbClr val="F6E1D5"/>
                       </a:solidFill>
                       <a:prstDash val="solid"/>
                     </a:lnL>
                     <a:lnR w="9525" cap="flat" cmpd="sng" algn="ctr">
                       <a:solidFill>
-                        <a:srgbClr val="F4DBCD"/>
+                        <a:srgbClr val="F6E1D5"/>
                       </a:solidFill>
                       <a:prstDash val="solid"/>
                     </a:lnR>
                     <a:lnT w="9525" cap="flat" cmpd="sng" algn="ctr">
                       <a:solidFill>
-                        <a:srgbClr val="F4DBCD"/>
+                        <a:srgbClr val="F6E1D5"/>
                       </a:solidFill>
                       <a:prstDash val="solid"/>
                     </a:lnT>
                     <a:lnB w="9525" cap="flat" cmpd="sng" algn="ctr">
                       <a:solidFill>
-                        <a:srgbClr val="F4DBCD"/>
+                        <a:srgbClr val="F6E1D5"/>
                       </a:solidFill>
                       <a:prstDash val="solid"/>
                     </a:lnB>
                     <a:solidFill>
-                      <a:srgbClr val="F4DBCD"/>
+                      <a:srgbClr val="F6E1D5"/>
                     </a:solidFill>
                   </a:tcPr>
                 </a:tc>
@@ -4353,7 +4577,7 @@
                       <a:r>
                         <a:rPr sz="1500" b="0">
                           <a:solidFill>
-                            <a:srgbClr val="2B2B2B"/>
+                            <a:srgbClr val="26231F"/>
                           </a:solidFill>
                         </a:rPr>
                         <a:t>신랑 · 신부 입장</a:t>
@@ -4363,30 +4587,30 @@
                   <a:tcPr anchor="ctr" marL="73152" marR="73152">
                     <a:lnL w="9525" cap="flat" cmpd="sng" algn="ctr">
                       <a:solidFill>
-                        <a:srgbClr val="F4DBCD"/>
+                        <a:srgbClr val="F6E1D5"/>
                       </a:solidFill>
                       <a:prstDash val="solid"/>
                     </a:lnL>
                     <a:lnR w="9525" cap="flat" cmpd="sng" algn="ctr">
                       <a:solidFill>
-                        <a:srgbClr val="F4DBCD"/>
+                        <a:srgbClr val="F6E1D5"/>
                       </a:solidFill>
                       <a:prstDash val="solid"/>
                     </a:lnR>
                     <a:lnT w="9525" cap="flat" cmpd="sng" algn="ctr">
                       <a:solidFill>
-                        <a:srgbClr val="F4DBCD"/>
+                        <a:srgbClr val="F6E1D5"/>
                       </a:solidFill>
                       <a:prstDash val="solid"/>
                     </a:lnT>
                     <a:lnB w="9525" cap="flat" cmpd="sng" algn="ctr">
                       <a:solidFill>
-                        <a:srgbClr val="F4DBCD"/>
+                        <a:srgbClr val="F6E1D5"/>
                       </a:solidFill>
                       <a:prstDash val="solid"/>
                     </a:lnB>
                     <a:solidFill>
-                      <a:srgbClr val="FBF3EF"/>
+                      <a:srgbClr val="FBF2EC"/>
                     </a:solidFill>
                   </a:tcPr>
                 </a:tc>
@@ -4399,7 +4623,7 @@
                       <a:r>
                         <a:rPr sz="1500" b="0">
                           <a:solidFill>
-                            <a:srgbClr val="2B2B2B"/>
+                            <a:srgbClr val="26231F"/>
                           </a:solidFill>
                         </a:rPr>
                         <a:t/>
@@ -4409,30 +4633,30 @@
                   <a:tcPr anchor="ctr" marL="73152" marR="73152">
                     <a:lnL w="9525" cap="flat" cmpd="sng" algn="ctr">
                       <a:solidFill>
-                        <a:srgbClr val="F4DBCD"/>
+                        <a:srgbClr val="F6E1D5"/>
                       </a:solidFill>
                       <a:prstDash val="solid"/>
                     </a:lnL>
                     <a:lnR w="9525" cap="flat" cmpd="sng" algn="ctr">
                       <a:solidFill>
-                        <a:srgbClr val="F4DBCD"/>
+                        <a:srgbClr val="F6E1D5"/>
                       </a:solidFill>
                       <a:prstDash val="solid"/>
                     </a:lnR>
                     <a:lnT w="9525" cap="flat" cmpd="sng" algn="ctr">
                       <a:solidFill>
-                        <a:srgbClr val="F4DBCD"/>
+                        <a:srgbClr val="F6E1D5"/>
                       </a:solidFill>
                       <a:prstDash val="solid"/>
                     </a:lnT>
                     <a:lnB w="9525" cap="flat" cmpd="sng" algn="ctr">
                       <a:solidFill>
-                        <a:srgbClr val="F4DBCD"/>
+                        <a:srgbClr val="F6E1D5"/>
                       </a:solidFill>
                       <a:prstDash val="solid"/>
                     </a:lnB>
                     <a:solidFill>
-                      <a:srgbClr val="FBF3EF"/>
+                      <a:srgbClr val="FBF2EC"/>
                     </a:solidFill>
                   </a:tcPr>
                 </a:tc>
@@ -4447,7 +4671,7 @@
                       <a:r>
                         <a:rPr sz="1500" b="1">
                           <a:solidFill>
-                            <a:srgbClr val="492713"/>
+                            <a:srgbClr val="493427"/>
                           </a:solidFill>
                         </a:rPr>
                         <a:t>00:00</a:t>
@@ -4457,30 +4681,30 @@
                   <a:tcPr anchor="ctr" marL="73152" marR="73152">
                     <a:lnL w="9525" cap="flat" cmpd="sng" algn="ctr">
                       <a:solidFill>
-                        <a:srgbClr val="F4DBCD"/>
+                        <a:srgbClr val="F6E1D5"/>
                       </a:solidFill>
                       <a:prstDash val="solid"/>
                     </a:lnL>
                     <a:lnR w="9525" cap="flat" cmpd="sng" algn="ctr">
                       <a:solidFill>
-                        <a:srgbClr val="F4DBCD"/>
+                        <a:srgbClr val="F6E1D5"/>
                       </a:solidFill>
                       <a:prstDash val="solid"/>
                     </a:lnR>
                     <a:lnT w="9525" cap="flat" cmpd="sng" algn="ctr">
                       <a:solidFill>
-                        <a:srgbClr val="F4DBCD"/>
+                        <a:srgbClr val="F6E1D5"/>
                       </a:solidFill>
                       <a:prstDash val="solid"/>
                     </a:lnT>
                     <a:lnB w="9525" cap="flat" cmpd="sng" algn="ctr">
                       <a:solidFill>
-                        <a:srgbClr val="F4DBCD"/>
+                        <a:srgbClr val="F6E1D5"/>
                       </a:solidFill>
                       <a:prstDash val="solid"/>
                     </a:lnB>
                     <a:solidFill>
-                      <a:srgbClr val="F4DBCD"/>
+                      <a:srgbClr val="F6E1D5"/>
                     </a:solidFill>
                   </a:tcPr>
                 </a:tc>
@@ -4493,7 +4717,7 @@
                       <a:r>
                         <a:rPr sz="1500" b="0">
                           <a:solidFill>
-                            <a:srgbClr val="2B2B2B"/>
+                            <a:srgbClr val="26231F"/>
                           </a:solidFill>
                         </a:rPr>
                         <a:t>혼인 서약</a:t>
@@ -4503,25 +4727,25 @@
                   <a:tcPr anchor="ctr" marL="73152" marR="73152">
                     <a:lnL w="9525" cap="flat" cmpd="sng" algn="ctr">
                       <a:solidFill>
-                        <a:srgbClr val="F4DBCD"/>
+                        <a:srgbClr val="F6E1D5"/>
                       </a:solidFill>
                       <a:prstDash val="solid"/>
                     </a:lnL>
                     <a:lnR w="9525" cap="flat" cmpd="sng" algn="ctr">
                       <a:solidFill>
-                        <a:srgbClr val="F4DBCD"/>
+                        <a:srgbClr val="F6E1D5"/>
                       </a:solidFill>
                       <a:prstDash val="solid"/>
                     </a:lnR>
                     <a:lnT w="9525" cap="flat" cmpd="sng" algn="ctr">
                       <a:solidFill>
-                        <a:srgbClr val="F4DBCD"/>
+                        <a:srgbClr val="F6E1D5"/>
                       </a:solidFill>
                       <a:prstDash val="solid"/>
                     </a:lnT>
                     <a:lnB w="9525" cap="flat" cmpd="sng" algn="ctr">
                       <a:solidFill>
-                        <a:srgbClr val="F4DBCD"/>
+                        <a:srgbClr val="F6E1D5"/>
                       </a:solidFill>
                       <a:prstDash val="solid"/>
                     </a:lnB>
@@ -4539,7 +4763,7 @@
                       <a:r>
                         <a:rPr sz="1500" b="0">
                           <a:solidFill>
-                            <a:srgbClr val="2B2B2B"/>
+                            <a:srgbClr val="26231F"/>
                           </a:solidFill>
                         </a:rPr>
                         <a:t/>
@@ -4549,25 +4773,25 @@
                   <a:tcPr anchor="ctr" marL="73152" marR="73152">
                     <a:lnL w="9525" cap="flat" cmpd="sng" algn="ctr">
                       <a:solidFill>
-                        <a:srgbClr val="F4DBCD"/>
+                        <a:srgbClr val="F6E1D5"/>
                       </a:solidFill>
                       <a:prstDash val="solid"/>
                     </a:lnL>
                     <a:lnR w="9525" cap="flat" cmpd="sng" algn="ctr">
                       <a:solidFill>
-                        <a:srgbClr val="F4DBCD"/>
+                        <a:srgbClr val="F6E1D5"/>
                       </a:solidFill>
                       <a:prstDash val="solid"/>
                     </a:lnR>
                     <a:lnT w="9525" cap="flat" cmpd="sng" algn="ctr">
                       <a:solidFill>
-                        <a:srgbClr val="F4DBCD"/>
+                        <a:srgbClr val="F6E1D5"/>
                       </a:solidFill>
                       <a:prstDash val="solid"/>
                     </a:lnT>
                     <a:lnB w="9525" cap="flat" cmpd="sng" algn="ctr">
                       <a:solidFill>
-                        <a:srgbClr val="F4DBCD"/>
+                        <a:srgbClr val="F6E1D5"/>
                       </a:solidFill>
                       <a:prstDash val="solid"/>
                     </a:lnB>
@@ -4587,7 +4811,7 @@
                       <a:r>
                         <a:rPr sz="1500" b="1">
                           <a:solidFill>
-                            <a:srgbClr val="492713"/>
+                            <a:srgbClr val="493427"/>
                           </a:solidFill>
                         </a:rPr>
                         <a:t>00:00</a:t>
@@ -4597,30 +4821,30 @@
                   <a:tcPr anchor="ctr" marL="73152" marR="73152">
                     <a:lnL w="9525" cap="flat" cmpd="sng" algn="ctr">
                       <a:solidFill>
-                        <a:srgbClr val="F4DBCD"/>
+                        <a:srgbClr val="F6E1D5"/>
                       </a:solidFill>
                       <a:prstDash val="solid"/>
                     </a:lnL>
                     <a:lnR w="9525" cap="flat" cmpd="sng" algn="ctr">
                       <a:solidFill>
-                        <a:srgbClr val="F4DBCD"/>
+                        <a:srgbClr val="F6E1D5"/>
                       </a:solidFill>
                       <a:prstDash val="solid"/>
                     </a:lnR>
                     <a:lnT w="9525" cap="flat" cmpd="sng" algn="ctr">
                       <a:solidFill>
-                        <a:srgbClr val="F4DBCD"/>
+                        <a:srgbClr val="F6E1D5"/>
                       </a:solidFill>
                       <a:prstDash val="solid"/>
                     </a:lnT>
                     <a:lnB w="9525" cap="flat" cmpd="sng" algn="ctr">
                       <a:solidFill>
-                        <a:srgbClr val="F4DBCD"/>
+                        <a:srgbClr val="F6E1D5"/>
                       </a:solidFill>
                       <a:prstDash val="solid"/>
                     </a:lnB>
                     <a:solidFill>
-                      <a:srgbClr val="F4DBCD"/>
+                      <a:srgbClr val="F6E1D5"/>
                     </a:solidFill>
                   </a:tcPr>
                 </a:tc>
@@ -4633,7 +4857,7 @@
                       <a:r>
                         <a:rPr sz="1500" b="0">
                           <a:solidFill>
-                            <a:srgbClr val="2B2B2B"/>
+                            <a:srgbClr val="26231F"/>
                           </a:solidFill>
                         </a:rPr>
                         <a:t>축가 · 감사 인사</a:t>
@@ -4643,30 +4867,30 @@
                   <a:tcPr anchor="ctr" marL="73152" marR="73152">
                     <a:lnL w="9525" cap="flat" cmpd="sng" algn="ctr">
                       <a:solidFill>
-                        <a:srgbClr val="F4DBCD"/>
+                        <a:srgbClr val="F6E1D5"/>
                       </a:solidFill>
                       <a:prstDash val="solid"/>
                     </a:lnL>
                     <a:lnR w="9525" cap="flat" cmpd="sng" algn="ctr">
                       <a:solidFill>
-                        <a:srgbClr val="F4DBCD"/>
+                        <a:srgbClr val="F6E1D5"/>
                       </a:solidFill>
                       <a:prstDash val="solid"/>
                     </a:lnR>
                     <a:lnT w="9525" cap="flat" cmpd="sng" algn="ctr">
                       <a:solidFill>
-                        <a:srgbClr val="F4DBCD"/>
+                        <a:srgbClr val="F6E1D5"/>
                       </a:solidFill>
                       <a:prstDash val="solid"/>
                     </a:lnT>
                     <a:lnB w="9525" cap="flat" cmpd="sng" algn="ctr">
                       <a:solidFill>
-                        <a:srgbClr val="F4DBCD"/>
+                        <a:srgbClr val="F6E1D5"/>
                       </a:solidFill>
                       <a:prstDash val="solid"/>
                     </a:lnB>
                     <a:solidFill>
-                      <a:srgbClr val="FBF3EF"/>
+                      <a:srgbClr val="FBF2EC"/>
                     </a:solidFill>
                   </a:tcPr>
                 </a:tc>
@@ -4679,7 +4903,7 @@
                       <a:r>
                         <a:rPr sz="1500" b="0">
                           <a:solidFill>
-                            <a:srgbClr val="2B2B2B"/>
+                            <a:srgbClr val="26231F"/>
                           </a:solidFill>
                         </a:rPr>
                         <a:t/>
@@ -4689,30 +4913,30 @@
                   <a:tcPr anchor="ctr" marL="73152" marR="73152">
                     <a:lnL w="9525" cap="flat" cmpd="sng" algn="ctr">
                       <a:solidFill>
-                        <a:srgbClr val="F4DBCD"/>
+                        <a:srgbClr val="F6E1D5"/>
                       </a:solidFill>
                       <a:prstDash val="solid"/>
                     </a:lnL>
                     <a:lnR w="9525" cap="flat" cmpd="sng" algn="ctr">
                       <a:solidFill>
-                        <a:srgbClr val="F4DBCD"/>
+                        <a:srgbClr val="F6E1D5"/>
                       </a:solidFill>
                       <a:prstDash val="solid"/>
                     </a:lnR>
                     <a:lnT w="9525" cap="flat" cmpd="sng" algn="ctr">
                       <a:solidFill>
-                        <a:srgbClr val="F4DBCD"/>
+                        <a:srgbClr val="F6E1D5"/>
                       </a:solidFill>
                       <a:prstDash val="solid"/>
                     </a:lnT>
                     <a:lnB w="9525" cap="flat" cmpd="sng" algn="ctr">
                       <a:solidFill>
-                        <a:srgbClr val="F4DBCD"/>
+                        <a:srgbClr val="F6E1D5"/>
                       </a:solidFill>
                       <a:prstDash val="solid"/>
                     </a:lnB>
                     <a:solidFill>
-                      <a:srgbClr val="FBF3EF"/>
+                      <a:srgbClr val="FBF2EC"/>
                     </a:solidFill>
                   </a:tcPr>
                 </a:tc>
@@ -4727,7 +4951,7 @@
                       <a:r>
                         <a:rPr sz="1500" b="1">
                           <a:solidFill>
-                            <a:srgbClr val="492713"/>
+                            <a:srgbClr val="493427"/>
                           </a:solidFill>
                         </a:rPr>
                         <a:t>00:00</a:t>
@@ -4737,30 +4961,30 @@
                   <a:tcPr anchor="ctr" marL="73152" marR="73152">
                     <a:lnL w="9525" cap="flat" cmpd="sng" algn="ctr">
                       <a:solidFill>
-                        <a:srgbClr val="F4DBCD"/>
+                        <a:srgbClr val="F6E1D5"/>
                       </a:solidFill>
                       <a:prstDash val="solid"/>
                     </a:lnL>
                     <a:lnR w="9525" cap="flat" cmpd="sng" algn="ctr">
                       <a:solidFill>
-                        <a:srgbClr val="F4DBCD"/>
+                        <a:srgbClr val="F6E1D5"/>
                       </a:solidFill>
                       <a:prstDash val="solid"/>
                     </a:lnR>
                     <a:lnT w="9525" cap="flat" cmpd="sng" algn="ctr">
                       <a:solidFill>
-                        <a:srgbClr val="F4DBCD"/>
+                        <a:srgbClr val="F6E1D5"/>
                       </a:solidFill>
                       <a:prstDash val="solid"/>
                     </a:lnT>
                     <a:lnB w="9525" cap="flat" cmpd="sng" algn="ctr">
                       <a:solidFill>
-                        <a:srgbClr val="F4DBCD"/>
+                        <a:srgbClr val="F6E1D5"/>
                       </a:solidFill>
                       <a:prstDash val="solid"/>
                     </a:lnB>
                     <a:solidFill>
-                      <a:srgbClr val="F4DBCD"/>
+                      <a:srgbClr val="F6E1D5"/>
                     </a:solidFill>
                   </a:tcPr>
                 </a:tc>
@@ -4773,7 +4997,7 @@
                       <a:r>
                         <a:rPr sz="1500" b="0">
                           <a:solidFill>
-                            <a:srgbClr val="2B2B2B"/>
+                            <a:srgbClr val="26231F"/>
                           </a:solidFill>
                         </a:rPr>
                         <a:t>기념 촬영 · 식사</a:t>
@@ -4783,25 +5007,25 @@
                   <a:tcPr anchor="ctr" marL="73152" marR="73152">
                     <a:lnL w="9525" cap="flat" cmpd="sng" algn="ctr">
                       <a:solidFill>
-                        <a:srgbClr val="F4DBCD"/>
+                        <a:srgbClr val="F6E1D5"/>
                       </a:solidFill>
                       <a:prstDash val="solid"/>
                     </a:lnL>
                     <a:lnR w="9525" cap="flat" cmpd="sng" algn="ctr">
                       <a:solidFill>
-                        <a:srgbClr val="F4DBCD"/>
+                        <a:srgbClr val="F6E1D5"/>
                       </a:solidFill>
                       <a:prstDash val="solid"/>
                     </a:lnR>
                     <a:lnT w="9525" cap="flat" cmpd="sng" algn="ctr">
                       <a:solidFill>
-                        <a:srgbClr val="F4DBCD"/>
+                        <a:srgbClr val="F6E1D5"/>
                       </a:solidFill>
                       <a:prstDash val="solid"/>
                     </a:lnT>
                     <a:lnB w="9525" cap="flat" cmpd="sng" algn="ctr">
                       <a:solidFill>
-                        <a:srgbClr val="F4DBCD"/>
+                        <a:srgbClr val="F6E1D5"/>
                       </a:solidFill>
                       <a:prstDash val="solid"/>
                     </a:lnB>
@@ -4819,7 +5043,7 @@
                       <a:r>
                         <a:rPr sz="1500" b="0">
                           <a:solidFill>
-                            <a:srgbClr val="2B2B2B"/>
+                            <a:srgbClr val="26231F"/>
                           </a:solidFill>
                         </a:rPr>
                         <a:t/>
@@ -4829,25 +5053,25 @@
                   <a:tcPr anchor="ctr" marL="73152" marR="73152">
                     <a:lnL w="9525" cap="flat" cmpd="sng" algn="ctr">
                       <a:solidFill>
-                        <a:srgbClr val="F4DBCD"/>
+                        <a:srgbClr val="F6E1D5"/>
                       </a:solidFill>
                       <a:prstDash val="solid"/>
                     </a:lnL>
                     <a:lnR w="9525" cap="flat" cmpd="sng" algn="ctr">
                       <a:solidFill>
-                        <a:srgbClr val="F4DBCD"/>
+                        <a:srgbClr val="F6E1D5"/>
                       </a:solidFill>
                       <a:prstDash val="solid"/>
                     </a:lnR>
                     <a:lnT w="9525" cap="flat" cmpd="sng" algn="ctr">
                       <a:solidFill>
-                        <a:srgbClr val="F4DBCD"/>
+                        <a:srgbClr val="F6E1D5"/>
                       </a:solidFill>
                       <a:prstDash val="solid"/>
                     </a:lnT>
                     <a:lnB w="9525" cap="flat" cmpd="sng" algn="ctr">
                       <a:solidFill>
-                        <a:srgbClr val="F4DBCD"/>
+                        <a:srgbClr val="F6E1D5"/>
                       </a:solidFill>
                       <a:prstDash val="solid"/>
                     </a:lnB>
@@ -4875,7 +5099,7 @@
     <p:bg>
       <p:bgPr>
         <a:solidFill>
-          <a:srgbClr val="FBF3EF"/>
+          <a:srgbClr val="FFFFFF"/>
         </a:solidFill>
         <a:effectLst/>
       </p:bgPr>
@@ -4895,180 +5119,95 @@
         </p:nvSpPr>
         <p:spPr>
           <a:xfrm>
-            <a:off x="256032" y="256032"/>
-            <a:ext cx="11679631" cy="6345936"/>
+            <a:off x="0" y="6565392"/>
+            <a:ext cx="12191695" cy="292608"/>
           </a:xfrm>
           <a:prstGeom prst="rect">
             <a:avLst/>
           </a:prstGeom>
-          <a:noFill/>
-          <a:ln w="28575">
-            <a:solidFill>
-              <a:srgbClr val="995229"/>
-            </a:solidFill>
-          </a:ln>
-        </p:spPr>
-        <p:txBody>
-          <a:bodyPr rtlCol="0" anchor="ctr"/>
-          <a:lstStyle/>
-          <a:p>
-            <a:pPr algn="ctr"/>
-          </a:p>
-        </p:txBody>
-      </p:sp>
-      <p:sp>
-        <p:nvSpPr>
-          <p:cNvPr id="4" name="장식"/>
-          <p:cNvSpPr/>
-          <p:nvPr/>
-        </p:nvSpPr>
-        <p:spPr>
-          <a:xfrm>
-            <a:off x="384048" y="384048"/>
-            <a:ext cx="11423599" cy="6089904"/>
-          </a:xfrm>
-          <a:prstGeom prst="rect">
-            <a:avLst/>
-          </a:prstGeom>
-          <a:noFill/>
-          <a:ln w="9525">
-            <a:solidFill>
-              <a:srgbClr val="F4DBCD"/>
-            </a:solidFill>
-          </a:ln>
-        </p:spPr>
-        <p:txBody>
-          <a:bodyPr rtlCol="0" anchor="ctr"/>
-          <a:lstStyle/>
-          <a:p>
-            <a:pPr algn="ctr"/>
-          </a:p>
-        </p:txBody>
-      </p:sp>
-      <p:sp>
-        <p:nvSpPr>
-          <p:cNvPr id="2" name="Title 1"/>
-          <p:cNvSpPr>
-            <a:spLocks noGrp="1"/>
-          </p:cNvSpPr>
-          <p:nvPr>
-            <p:ph type="title"/>
-          </p:nvPr>
-        </p:nvSpPr>
-        <p:spPr>
-          <a:xfrm>
-            <a:off x="822960" y="548640"/>
-            <a:ext cx="9265615" cy="822960"/>
-          </a:xfrm>
-        </p:spPr>
-        <p:txBody>
-          <a:bodyPr wrap="square" lIns="54864" rIns="54864" tIns="27432" bIns="27432" anchor="ctr">
-            <a:noAutofit/>
-          </a:bodyPr>
-          <a:lstStyle/>
-          <a:p>
-            <a:pPr algn="l">
-              <a:lnSpc>
-                <a:spcPct val="105000"/>
-              </a:lnSpc>
-            </a:pPr>
-            <a:r>
-              <a:rPr sz="3000" b="1" i="0">
-                <a:solidFill>
-                  <a:srgbClr val="492713"/>
-                </a:solidFill>
-              </a:rPr>
-              <a:t>하객 안내</a:t>
-            </a:r>
-          </a:p>
-        </p:txBody>
-      </p:sp>
-      <p:sp>
-        <p:nvSpPr>
-          <p:cNvPr id="5" name="카드 1"/>
-          <p:cNvSpPr/>
-          <p:nvPr/>
-        </p:nvSpPr>
-        <p:spPr>
-          <a:xfrm>
-            <a:off x="822960" y="1554480"/>
-            <a:ext cx="3362858" cy="4617720"/>
-          </a:xfrm>
-          <a:prstGeom prst="roundRect">
-            <a:avLst>
-              <a:gd name="adj" fmla="val 8000"/>
-            </a:avLst>
-          </a:prstGeom>
           <a:solidFill>
-            <a:srgbClr val="FBF3EF"/>
-          </a:solidFill>
-          <a:ln w="15875">
-            <a:solidFill>
-              <a:srgbClr val="F4DBCD"/>
-            </a:solidFill>
-          </a:ln>
-        </p:spPr>
-        <p:txBody>
-          <a:bodyPr rtlCol="0" anchor="ctr"/>
-          <a:lstStyle/>
-          <a:p>
-            <a:pPr algn="ctr"/>
-          </a:p>
-        </p:txBody>
-      </p:sp>
-      <p:sp>
-        <p:nvSpPr>
-          <p:cNvPr id="6" name="번호 1"/>
-          <p:cNvSpPr/>
-          <p:nvPr/>
-        </p:nvSpPr>
-        <p:spPr>
-          <a:xfrm>
-            <a:off x="1005840" y="1737360"/>
-            <a:ext cx="457200" cy="457200"/>
-          </a:xfrm>
-          <a:prstGeom prst="ellipse">
-            <a:avLst/>
-          </a:prstGeom>
-          <a:solidFill>
-            <a:srgbClr val="995229"/>
+            <a:srgbClr val="EBC4AD"/>
           </a:solidFill>
           <a:ln>
             <a:noFill/>
           </a:ln>
         </p:spPr>
         <p:txBody>
-          <a:bodyPr rtlCol="0" anchor="ctr" wrap="square" lIns="54864" rIns="54864" tIns="27432" bIns="27432">
-            <a:noAutofit/>
-          </a:bodyPr>
-          <a:lstStyle/>
-          <a:p>
-            <a:pPr algn="ctr">
-              <a:lnSpc>
-                <a:spcPct val="100000"/>
-              </a:lnSpc>
-            </a:pPr>
-            <a:r>
-              <a:rPr sz="1600" b="1" i="0">
-                <a:solidFill>
-                  <a:srgbClr val="FFFFFF"/>
-                </a:solidFill>
-              </a:rPr>
-              <a:t>1</a:t>
-            </a:r>
-          </a:p>
-        </p:txBody>
-      </p:sp>
-      <p:sp>
-        <p:nvSpPr>
-          <p:cNvPr id="7" name="TextBox 6"/>
+          <a:bodyPr rtlCol="0" anchor="ctr"/>
+          <a:lstStyle/>
+          <a:p>
+            <a:pPr algn="ctr"/>
+          </a:p>
+        </p:txBody>
+      </p:sp>
+      <p:sp>
+        <p:nvSpPr>
+          <p:cNvPr id="4" name="포인트"/>
+          <p:cNvSpPr/>
+          <p:nvPr/>
+        </p:nvSpPr>
+        <p:spPr>
+          <a:xfrm>
+            <a:off x="5958687" y="246888"/>
+            <a:ext cx="274320" cy="274320"/>
+          </a:xfrm>
+          <a:prstGeom prst="moon">
+            <a:avLst/>
+          </a:prstGeom>
+          <a:solidFill>
+            <a:srgbClr val="D89C79"/>
+          </a:solidFill>
+          <a:ln>
+            <a:noFill/>
+          </a:ln>
+        </p:spPr>
+        <p:txBody>
+          <a:bodyPr rtlCol="0" anchor="ctr"/>
+          <a:lstStyle/>
+          <a:p>
+            <a:pPr algn="ctr"/>
+          </a:p>
+        </p:txBody>
+      </p:sp>
+      <p:sp>
+        <p:nvSpPr>
+          <p:cNvPr id="5" name="장식"/>
+          <p:cNvSpPr/>
+          <p:nvPr/>
+        </p:nvSpPr>
+        <p:spPr>
+          <a:xfrm>
+            <a:off x="5684367" y="1572768"/>
+            <a:ext cx="822960" cy="22860"/>
+          </a:xfrm>
+          <a:prstGeom prst="rect">
+            <a:avLst/>
+          </a:prstGeom>
+          <a:solidFill>
+            <a:srgbClr val="D89C79"/>
+          </a:solidFill>
+          <a:ln>
+            <a:noFill/>
+          </a:ln>
+        </p:spPr>
+        <p:txBody>
+          <a:bodyPr rtlCol="0" anchor="ctr"/>
+          <a:lstStyle/>
+          <a:p>
+            <a:pPr algn="ctr"/>
+          </a:p>
+        </p:txBody>
+      </p:sp>
+      <p:sp>
+        <p:nvSpPr>
+          <p:cNvPr id="6" name="상단 라벨"/>
           <p:cNvSpPr txBox="1"/>
           <p:nvPr/>
         </p:nvSpPr>
         <p:spPr>
           <a:xfrm>
-            <a:off x="960120" y="2331720"/>
-            <a:ext cx="3088538" cy="640080"/>
+            <a:off x="640080" y="182880"/>
+            <a:ext cx="3657600" cy="274320"/>
           </a:xfrm>
           <a:prstGeom prst="rect">
             <a:avLst/>
@@ -5087,9 +5226,156 @@
               </a:lnSpc>
             </a:pPr>
             <a:r>
+              <a:rPr sz="800" b="1" i="0" spc="250">
+                <a:solidFill>
+                  <a:srgbClr val="8E8780"/>
+                </a:solidFill>
+              </a:rPr>
+              <a:t>WEDDING</a:t>
+            </a:r>
+          </a:p>
+        </p:txBody>
+      </p:sp>
+      <p:sp>
+        <p:nvSpPr>
+          <p:cNvPr id="2" name="Title 1"/>
+          <p:cNvSpPr>
+            <a:spLocks noGrp="1"/>
+          </p:cNvSpPr>
+          <p:nvPr>
+            <p:ph type="title"/>
+          </p:nvPr>
+        </p:nvSpPr>
+        <p:spPr>
+          <a:xfrm>
+            <a:off x="1371600" y="640080"/>
+            <a:ext cx="9448495" cy="868680"/>
+          </a:xfrm>
+        </p:spPr>
+        <p:txBody>
+          <a:bodyPr wrap="square" lIns="54864" rIns="54864" tIns="27432" bIns="27432" anchor="ctr">
+            <a:noAutofit/>
+          </a:bodyPr>
+          <a:lstStyle/>
+          <a:p>
+            <a:pPr algn="ctr">
+              <a:lnSpc>
+                <a:spcPct val="105000"/>
+              </a:lnSpc>
+            </a:pPr>
+            <a:r>
+              <a:rPr sz="3000" b="1" i="0">
+                <a:solidFill>
+                  <a:srgbClr val="26231F"/>
+                </a:solidFill>
+              </a:rPr>
+              <a:t>하객 안내</a:t>
+            </a:r>
+          </a:p>
+        </p:txBody>
+      </p:sp>
+      <p:sp>
+        <p:nvSpPr>
+          <p:cNvPr id="7" name="카드 1"/>
+          <p:cNvSpPr/>
+          <p:nvPr/>
+        </p:nvSpPr>
+        <p:spPr>
+          <a:xfrm>
+            <a:off x="640080" y="1783080"/>
+            <a:ext cx="3484778" cy="4389120"/>
+          </a:xfrm>
+          <a:prstGeom prst="roundRect">
+            <a:avLst>
+              <a:gd name="adj" fmla="val 7000"/>
+            </a:avLst>
+          </a:prstGeom>
+          <a:solidFill>
+            <a:srgbClr val="FFFFFF"/>
+          </a:solidFill>
+          <a:ln w="12700">
+            <a:solidFill>
+              <a:srgbClr val="EBC4AD"/>
+            </a:solidFill>
+          </a:ln>
+        </p:spPr>
+        <p:txBody>
+          <a:bodyPr rtlCol="0" anchor="ctr"/>
+          <a:lstStyle/>
+          <a:p>
+            <a:pPr algn="ctr"/>
+          </a:p>
+        </p:txBody>
+      </p:sp>
+      <p:sp>
+        <p:nvSpPr>
+          <p:cNvPr id="8" name="번호 1"/>
+          <p:cNvSpPr txBox="1"/>
+          <p:nvPr/>
+        </p:nvSpPr>
+        <p:spPr>
+          <a:xfrm>
+            <a:off x="731519" y="1920240"/>
+            <a:ext cx="914400" cy="548640"/>
+          </a:xfrm>
+          <a:prstGeom prst="rect">
+            <a:avLst/>
+          </a:prstGeom>
+          <a:noFill/>
+        </p:spPr>
+        <p:txBody>
+          <a:bodyPr wrap="square" lIns="54864" rIns="54864" tIns="27432" bIns="27432" anchor="ctr">
+            <a:noAutofit/>
+          </a:bodyPr>
+          <a:lstStyle/>
+          <a:p>
+            <a:pPr algn="l">
+              <a:lnSpc>
+                <a:spcPct val="115000"/>
+              </a:lnSpc>
+            </a:pPr>
+            <a:r>
+              <a:rPr sz="2400" b="1" i="0">
+                <a:solidFill>
+                  <a:srgbClr val="D89C79"/>
+                </a:solidFill>
+              </a:rPr>
+              <a:t>01</a:t>
+            </a:r>
+          </a:p>
+        </p:txBody>
+      </p:sp>
+      <p:sp>
+        <p:nvSpPr>
+          <p:cNvPr id="9" name="TextBox 8"/>
+          <p:cNvSpPr txBox="1"/>
+          <p:nvPr/>
+        </p:nvSpPr>
+        <p:spPr>
+          <a:xfrm>
+            <a:off x="777240" y="2560320"/>
+            <a:ext cx="3210458" cy="640080"/>
+          </a:xfrm>
+          <a:prstGeom prst="rect">
+            <a:avLst/>
+          </a:prstGeom>
+          <a:noFill/>
+        </p:spPr>
+        <p:txBody>
+          <a:bodyPr wrap="square" lIns="54864" rIns="54864" tIns="27432" bIns="27432" anchor="ctr">
+            <a:noAutofit/>
+          </a:bodyPr>
+          <a:lstStyle/>
+          <a:p>
+            <a:pPr algn="l">
+              <a:lnSpc>
+                <a:spcPct val="115000"/>
+              </a:lnSpc>
+            </a:pPr>
+            <a:r>
               <a:rPr sz="1800" b="1" i="0">
                 <a:solidFill>
-                  <a:srgbClr val="492713"/>
+                  <a:srgbClr val="493427"/>
                 </a:solidFill>
               </a:rPr>
               <a:t>주차 안내</a:t>
@@ -5099,14 +5385,14 @@
       </p:sp>
       <p:sp>
         <p:nvSpPr>
-          <p:cNvPr id="8" name="TextBox 7"/>
+          <p:cNvPr id="10" name="TextBox 9"/>
           <p:cNvSpPr txBox="1"/>
           <p:nvPr/>
         </p:nvSpPr>
         <p:spPr>
           <a:xfrm>
-            <a:off x="960120" y="3017520"/>
-            <a:ext cx="3088538" cy="3017520"/>
+            <a:off x="777240" y="3246120"/>
+            <a:ext cx="3210458" cy="2788920"/>
           </a:xfrm>
           <a:prstGeom prst="rect">
             <a:avLst/>
@@ -5127,7 +5413,7 @@
             <a:r>
               <a:rPr sz="1500" b="0" i="0">
                 <a:solidFill>
-                  <a:srgbClr val="2B2B2B"/>
+                  <a:srgbClr val="26231F"/>
                 </a:solidFill>
               </a:rPr>
               <a:t>입력하세요</a:t>
@@ -5137,26 +5423,26 @@
       </p:sp>
       <p:sp>
         <p:nvSpPr>
-          <p:cNvPr id="9" name="카드 2"/>
+          <p:cNvPr id="11" name="카드 2"/>
           <p:cNvSpPr/>
           <p:nvPr/>
         </p:nvSpPr>
         <p:spPr>
           <a:xfrm>
-            <a:off x="4414418" y="1554480"/>
-            <a:ext cx="3362858" cy="4617720"/>
+            <a:off x="4353458" y="1783080"/>
+            <a:ext cx="3484778" cy="4389120"/>
           </a:xfrm>
           <a:prstGeom prst="roundRect">
             <a:avLst>
-              <a:gd name="adj" fmla="val 8000"/>
+              <a:gd name="adj" fmla="val 7000"/>
             </a:avLst>
           </a:prstGeom>
           <a:solidFill>
-            <a:srgbClr val="FBF3EF"/>
+            <a:srgbClr val="FFFFFF"/>
           </a:solidFill>
-          <a:ln w="15875">
+          <a:ln w="12700">
             <a:solidFill>
-              <a:srgbClr val="F4DBCD"/>
+              <a:srgbClr val="EBC4AD"/>
             </a:solidFill>
           </a:ln>
         </p:spPr>
@@ -5170,57 +5456,14 @@
       </p:sp>
       <p:sp>
         <p:nvSpPr>
-          <p:cNvPr id="10" name="번호 2"/>
-          <p:cNvSpPr/>
-          <p:nvPr/>
-        </p:nvSpPr>
-        <p:spPr>
-          <a:xfrm>
-            <a:off x="4597298" y="1737360"/>
-            <a:ext cx="457200" cy="457200"/>
-          </a:xfrm>
-          <a:prstGeom prst="ellipse">
-            <a:avLst/>
-          </a:prstGeom>
-          <a:solidFill>
-            <a:srgbClr val="995229"/>
-          </a:solidFill>
-          <a:ln>
-            <a:noFill/>
-          </a:ln>
-        </p:spPr>
-        <p:txBody>
-          <a:bodyPr rtlCol="0" anchor="ctr" wrap="square" lIns="54864" rIns="54864" tIns="27432" bIns="27432">
-            <a:noAutofit/>
-          </a:bodyPr>
-          <a:lstStyle/>
-          <a:p>
-            <a:pPr algn="ctr">
-              <a:lnSpc>
-                <a:spcPct val="100000"/>
-              </a:lnSpc>
-            </a:pPr>
-            <a:r>
-              <a:rPr sz="1600" b="1" i="0">
-                <a:solidFill>
-                  <a:srgbClr val="FFFFFF"/>
-                </a:solidFill>
-              </a:rPr>
-              <a:t>2</a:t>
-            </a:r>
-          </a:p>
-        </p:txBody>
-      </p:sp>
-      <p:sp>
-        <p:nvSpPr>
-          <p:cNvPr id="11" name="TextBox 10"/>
+          <p:cNvPr id="12" name="번호 2"/>
           <p:cNvSpPr txBox="1"/>
           <p:nvPr/>
         </p:nvSpPr>
         <p:spPr>
           <a:xfrm>
-            <a:off x="4551578" y="2331720"/>
-            <a:ext cx="3088538" cy="640080"/>
+            <a:off x="4444898" y="1920240"/>
+            <a:ext cx="914400" cy="548640"/>
           </a:xfrm>
           <a:prstGeom prst="rect">
             <a:avLst/>
@@ -5239,9 +5482,47 @@
               </a:lnSpc>
             </a:pPr>
             <a:r>
+              <a:rPr sz="2400" b="1" i="0">
+                <a:solidFill>
+                  <a:srgbClr val="D89C79"/>
+                </a:solidFill>
+              </a:rPr>
+              <a:t>02</a:t>
+            </a:r>
+          </a:p>
+        </p:txBody>
+      </p:sp>
+      <p:sp>
+        <p:nvSpPr>
+          <p:cNvPr id="13" name="TextBox 12"/>
+          <p:cNvSpPr txBox="1"/>
+          <p:nvPr/>
+        </p:nvSpPr>
+        <p:spPr>
+          <a:xfrm>
+            <a:off x="4490618" y="2560320"/>
+            <a:ext cx="3210458" cy="640080"/>
+          </a:xfrm>
+          <a:prstGeom prst="rect">
+            <a:avLst/>
+          </a:prstGeom>
+          <a:noFill/>
+        </p:spPr>
+        <p:txBody>
+          <a:bodyPr wrap="square" lIns="54864" rIns="54864" tIns="27432" bIns="27432" anchor="ctr">
+            <a:noAutofit/>
+          </a:bodyPr>
+          <a:lstStyle/>
+          <a:p>
+            <a:pPr algn="l">
+              <a:lnSpc>
+                <a:spcPct val="115000"/>
+              </a:lnSpc>
+            </a:pPr>
+            <a:r>
               <a:rPr sz="1800" b="1" i="0">
                 <a:solidFill>
-                  <a:srgbClr val="492713"/>
+                  <a:srgbClr val="493427"/>
                 </a:solidFill>
               </a:rPr>
               <a:t>식사 안내</a:t>
@@ -5251,14 +5532,14 @@
       </p:sp>
       <p:sp>
         <p:nvSpPr>
-          <p:cNvPr id="12" name="TextBox 11"/>
+          <p:cNvPr id="14" name="TextBox 13"/>
           <p:cNvSpPr txBox="1"/>
           <p:nvPr/>
         </p:nvSpPr>
         <p:spPr>
           <a:xfrm>
-            <a:off x="4551578" y="3017520"/>
-            <a:ext cx="3088538" cy="3017520"/>
+            <a:off x="4490618" y="3246120"/>
+            <a:ext cx="3210458" cy="2788920"/>
           </a:xfrm>
           <a:prstGeom prst="rect">
             <a:avLst/>
@@ -5279,7 +5560,7 @@
             <a:r>
               <a:rPr sz="1500" b="0" i="0">
                 <a:solidFill>
-                  <a:srgbClr val="2B2B2B"/>
+                  <a:srgbClr val="26231F"/>
                 </a:solidFill>
               </a:rPr>
               <a:t>입력하세요</a:t>
@@ -5289,26 +5570,26 @@
       </p:sp>
       <p:sp>
         <p:nvSpPr>
-          <p:cNvPr id="13" name="카드 3"/>
+          <p:cNvPr id="15" name="카드 3"/>
           <p:cNvSpPr/>
           <p:nvPr/>
         </p:nvSpPr>
         <p:spPr>
           <a:xfrm>
-            <a:off x="8005876" y="1554480"/>
-            <a:ext cx="3362858" cy="4617720"/>
+            <a:off x="8066836" y="1783080"/>
+            <a:ext cx="3484778" cy="4389120"/>
           </a:xfrm>
           <a:prstGeom prst="roundRect">
             <a:avLst>
-              <a:gd name="adj" fmla="val 8000"/>
+              <a:gd name="adj" fmla="val 7000"/>
             </a:avLst>
           </a:prstGeom>
           <a:solidFill>
-            <a:srgbClr val="FBF3EF"/>
+            <a:srgbClr val="FFFFFF"/>
           </a:solidFill>
-          <a:ln w="15875">
+          <a:ln w="12700">
             <a:solidFill>
-              <a:srgbClr val="F4DBCD"/>
+              <a:srgbClr val="EBC4AD"/>
             </a:solidFill>
           </a:ln>
         </p:spPr>
@@ -5322,57 +5603,14 @@
       </p:sp>
       <p:sp>
         <p:nvSpPr>
-          <p:cNvPr id="14" name="번호 3"/>
-          <p:cNvSpPr/>
-          <p:nvPr/>
-        </p:nvSpPr>
-        <p:spPr>
-          <a:xfrm>
-            <a:off x="8188756" y="1737360"/>
-            <a:ext cx="457200" cy="457200"/>
-          </a:xfrm>
-          <a:prstGeom prst="ellipse">
-            <a:avLst/>
-          </a:prstGeom>
-          <a:solidFill>
-            <a:srgbClr val="995229"/>
-          </a:solidFill>
-          <a:ln>
-            <a:noFill/>
-          </a:ln>
-        </p:spPr>
-        <p:txBody>
-          <a:bodyPr rtlCol="0" anchor="ctr" wrap="square" lIns="54864" rIns="54864" tIns="27432" bIns="27432">
-            <a:noAutofit/>
-          </a:bodyPr>
-          <a:lstStyle/>
-          <a:p>
-            <a:pPr algn="ctr">
-              <a:lnSpc>
-                <a:spcPct val="100000"/>
-              </a:lnSpc>
-            </a:pPr>
-            <a:r>
-              <a:rPr sz="1600" b="1" i="0">
-                <a:solidFill>
-                  <a:srgbClr val="FFFFFF"/>
-                </a:solidFill>
-              </a:rPr>
-              <a:t>3</a:t>
-            </a:r>
-          </a:p>
-        </p:txBody>
-      </p:sp>
-      <p:sp>
-        <p:nvSpPr>
-          <p:cNvPr id="15" name="TextBox 14"/>
+          <p:cNvPr id="16" name="번호 3"/>
           <p:cNvSpPr txBox="1"/>
           <p:nvPr/>
         </p:nvSpPr>
         <p:spPr>
           <a:xfrm>
-            <a:off x="8143036" y="2331720"/>
-            <a:ext cx="3088538" cy="640080"/>
+            <a:off x="8158276" y="1920240"/>
+            <a:ext cx="914400" cy="548640"/>
           </a:xfrm>
           <a:prstGeom prst="rect">
             <a:avLst/>
@@ -5391,9 +5629,47 @@
               </a:lnSpc>
             </a:pPr>
             <a:r>
+              <a:rPr sz="2400" b="1" i="0">
+                <a:solidFill>
+                  <a:srgbClr val="D89C79"/>
+                </a:solidFill>
+              </a:rPr>
+              <a:t>03</a:t>
+            </a:r>
+          </a:p>
+        </p:txBody>
+      </p:sp>
+      <p:sp>
+        <p:nvSpPr>
+          <p:cNvPr id="17" name="TextBox 16"/>
+          <p:cNvSpPr txBox="1"/>
+          <p:nvPr/>
+        </p:nvSpPr>
+        <p:spPr>
+          <a:xfrm>
+            <a:off x="8203996" y="2560320"/>
+            <a:ext cx="3210458" cy="640080"/>
+          </a:xfrm>
+          <a:prstGeom prst="rect">
+            <a:avLst/>
+          </a:prstGeom>
+          <a:noFill/>
+        </p:spPr>
+        <p:txBody>
+          <a:bodyPr wrap="square" lIns="54864" rIns="54864" tIns="27432" bIns="27432" anchor="ctr">
+            <a:noAutofit/>
+          </a:bodyPr>
+          <a:lstStyle/>
+          <a:p>
+            <a:pPr algn="l">
+              <a:lnSpc>
+                <a:spcPct val="115000"/>
+              </a:lnSpc>
+            </a:pPr>
+            <a:r>
               <a:rPr sz="1800" b="1" i="0">
                 <a:solidFill>
-                  <a:srgbClr val="492713"/>
+                  <a:srgbClr val="493427"/>
                 </a:solidFill>
               </a:rPr>
               <a:t>기념 촬영</a:t>
@@ -5403,14 +5679,14 @@
       </p:sp>
       <p:sp>
         <p:nvSpPr>
-          <p:cNvPr id="16" name="TextBox 15"/>
+          <p:cNvPr id="18" name="TextBox 17"/>
           <p:cNvSpPr txBox="1"/>
           <p:nvPr/>
         </p:nvSpPr>
         <p:spPr>
           <a:xfrm>
-            <a:off x="8143036" y="3017520"/>
-            <a:ext cx="3088538" cy="3017520"/>
+            <a:off x="8203996" y="3246120"/>
+            <a:ext cx="3210458" cy="2788920"/>
           </a:xfrm>
           <a:prstGeom prst="rect">
             <a:avLst/>
@@ -5431,7 +5707,7 @@
             <a:r>
               <a:rPr sz="1500" b="0" i="0">
                 <a:solidFill>
-                  <a:srgbClr val="2B2B2B"/>
+                  <a:srgbClr val="26231F"/>
                 </a:solidFill>
               </a:rPr>
               <a:t>입력하세요</a:t>
@@ -5453,7 +5729,7 @@
     <p:bg>
       <p:bgPr>
         <a:solidFill>
-          <a:srgbClr val="FBF3EF"/>
+          <a:srgbClr val="FFFFFF"/>
         </a:solidFill>
         <a:effectLst/>
       </p:bgPr>
@@ -5473,71 +5749,100 @@
         </p:nvSpPr>
         <p:spPr>
           <a:xfrm>
-            <a:off x="256032" y="256032"/>
-            <a:ext cx="11679631" cy="6345936"/>
+            <a:off x="0" y="6565392"/>
+            <a:ext cx="12191695" cy="292608"/>
+          </a:xfrm>
+          <a:prstGeom prst="rect">
+            <a:avLst/>
+          </a:prstGeom>
+          <a:solidFill>
+            <a:srgbClr val="EBC4AD"/>
+          </a:solidFill>
+          <a:ln>
+            <a:noFill/>
+          </a:ln>
+        </p:spPr>
+        <p:txBody>
+          <a:bodyPr rtlCol="0" anchor="ctr"/>
+          <a:lstStyle/>
+          <a:p>
+            <a:pPr algn="ctr"/>
+          </a:p>
+        </p:txBody>
+      </p:sp>
+      <p:sp>
+        <p:nvSpPr>
+          <p:cNvPr id="4" name="포인트"/>
+          <p:cNvSpPr/>
+          <p:nvPr/>
+        </p:nvSpPr>
+        <p:spPr>
+          <a:xfrm>
+            <a:off x="5958687" y="246888"/>
+            <a:ext cx="274320" cy="274320"/>
+          </a:xfrm>
+          <a:prstGeom prst="moon">
+            <a:avLst/>
+          </a:prstGeom>
+          <a:solidFill>
+            <a:srgbClr val="D89C79"/>
+          </a:solidFill>
+          <a:ln>
+            <a:noFill/>
+          </a:ln>
+        </p:spPr>
+        <p:txBody>
+          <a:bodyPr rtlCol="0" anchor="ctr"/>
+          <a:lstStyle/>
+          <a:p>
+            <a:pPr algn="ctr"/>
+          </a:p>
+        </p:txBody>
+      </p:sp>
+      <p:sp>
+        <p:nvSpPr>
+          <p:cNvPr id="5" name="장식"/>
+          <p:cNvSpPr/>
+          <p:nvPr/>
+        </p:nvSpPr>
+        <p:spPr>
+          <a:xfrm>
+            <a:off x="5684367" y="1572768"/>
+            <a:ext cx="822960" cy="22860"/>
+          </a:xfrm>
+          <a:prstGeom prst="rect">
+            <a:avLst/>
+          </a:prstGeom>
+          <a:solidFill>
+            <a:srgbClr val="D89C79"/>
+          </a:solidFill>
+          <a:ln>
+            <a:noFill/>
+          </a:ln>
+        </p:spPr>
+        <p:txBody>
+          <a:bodyPr rtlCol="0" anchor="ctr"/>
+          <a:lstStyle/>
+          <a:p>
+            <a:pPr algn="ctr"/>
+          </a:p>
+        </p:txBody>
+      </p:sp>
+      <p:sp>
+        <p:nvSpPr>
+          <p:cNvPr id="6" name="상단 라벨"/>
+          <p:cNvSpPr txBox="1"/>
+          <p:nvPr/>
+        </p:nvSpPr>
+        <p:spPr>
+          <a:xfrm>
+            <a:off x="640080" y="182880"/>
+            <a:ext cx="3657600" cy="274320"/>
           </a:xfrm>
           <a:prstGeom prst="rect">
             <a:avLst/>
           </a:prstGeom>
           <a:noFill/>
-          <a:ln w="28575">
-            <a:solidFill>
-              <a:srgbClr val="995229"/>
-            </a:solidFill>
-          </a:ln>
-        </p:spPr>
-        <p:txBody>
-          <a:bodyPr rtlCol="0" anchor="ctr"/>
-          <a:lstStyle/>
-          <a:p>
-            <a:pPr algn="ctr"/>
-          </a:p>
-        </p:txBody>
-      </p:sp>
-      <p:sp>
-        <p:nvSpPr>
-          <p:cNvPr id="4" name="장식"/>
-          <p:cNvSpPr/>
-          <p:nvPr/>
-        </p:nvSpPr>
-        <p:spPr>
-          <a:xfrm>
-            <a:off x="384048" y="384048"/>
-            <a:ext cx="11423599" cy="6089904"/>
-          </a:xfrm>
-          <a:prstGeom prst="rect">
-            <a:avLst/>
-          </a:prstGeom>
-          <a:noFill/>
-          <a:ln w="9525">
-            <a:solidFill>
-              <a:srgbClr val="F4DBCD"/>
-            </a:solidFill>
-          </a:ln>
-        </p:spPr>
-        <p:txBody>
-          <a:bodyPr rtlCol="0" anchor="ctr"/>
-          <a:lstStyle/>
-          <a:p>
-            <a:pPr algn="ctr"/>
-          </a:p>
-        </p:txBody>
-      </p:sp>
-      <p:sp>
-        <p:nvSpPr>
-          <p:cNvPr id="2" name="Title 1"/>
-          <p:cNvSpPr>
-            <a:spLocks noGrp="1"/>
-          </p:cNvSpPr>
-          <p:nvPr>
-            <p:ph type="title"/>
-          </p:nvPr>
-        </p:nvSpPr>
-        <p:spPr>
-          <a:xfrm>
-            <a:off x="822960" y="548640"/>
-            <a:ext cx="9265615" cy="822960"/>
-          </a:xfrm>
         </p:spPr>
         <p:txBody>
           <a:bodyPr wrap="square" lIns="54864" rIns="54864" tIns="27432" bIns="27432" anchor="ctr">
@@ -5546,6 +5851,44 @@
           <a:lstStyle/>
           <a:p>
             <a:pPr algn="l">
+              <a:lnSpc>
+                <a:spcPct val="115000"/>
+              </a:lnSpc>
+            </a:pPr>
+            <a:r>
+              <a:rPr sz="800" b="1" i="0" spc="250">
+                <a:solidFill>
+                  <a:srgbClr val="8E8780"/>
+                </a:solidFill>
+              </a:rPr>
+              <a:t>WEDDING</a:t>
+            </a:r>
+          </a:p>
+        </p:txBody>
+      </p:sp>
+      <p:sp>
+        <p:nvSpPr>
+          <p:cNvPr id="2" name="Title 1"/>
+          <p:cNvSpPr>
+            <a:spLocks noGrp="1"/>
+          </p:cNvSpPr>
+          <p:nvPr>
+            <p:ph type="title"/>
+          </p:nvPr>
+        </p:nvSpPr>
+        <p:spPr>
+          <a:xfrm>
+            <a:off x="1371600" y="640080"/>
+            <a:ext cx="9448495" cy="868680"/>
+          </a:xfrm>
+        </p:spPr>
+        <p:txBody>
+          <a:bodyPr wrap="square" lIns="54864" rIns="54864" tIns="27432" bIns="27432" anchor="ctr">
+            <a:noAutofit/>
+          </a:bodyPr>
+          <a:lstStyle/>
+          <a:p>
+            <a:pPr algn="ctr">
               <a:lnSpc>
                 <a:spcPct val="105000"/>
               </a:lnSpc>
@@ -5553,7 +5896,7 @@
             <a:r>
               <a:rPr sz="3000" b="1" i="0">
                 <a:solidFill>
-                  <a:srgbClr val="492713"/>
+                  <a:srgbClr val="26231F"/>
                 </a:solidFill>
               </a:rPr>
               <a:t>웨딩 사진</a:t>
@@ -5563,14 +5906,14 @@
       </p:sp>
       <p:sp>
         <p:nvSpPr>
-          <p:cNvPr id="5" name="사진 자리"/>
+          <p:cNvPr id="7" name="사진 자리"/>
           <p:cNvSpPr/>
           <p:nvPr/>
         </p:nvSpPr>
         <p:spPr>
           <a:xfrm>
-            <a:off x="822960" y="1554480"/>
-            <a:ext cx="3393338" cy="2217420"/>
+            <a:off x="640080" y="1783080"/>
+            <a:ext cx="3515258" cy="2103120"/>
           </a:xfrm>
           <a:prstGeom prst="roundRect">
             <a:avLst>
@@ -5578,12 +5921,10 @@
             </a:avLst>
           </a:prstGeom>
           <a:solidFill>
-            <a:srgbClr val="F4DBCD"/>
+            <a:srgbClr val="F6E1D5"/>
           </a:solidFill>
           <a:ln w="19050">
-            <a:solidFill>
-              <a:srgbClr val="995229"/>
-            </a:solidFill>
+            <a:noFill/>
             <a:prstDash val="dash"/>
           </a:ln>
         </p:spPr>
@@ -5601,7 +5942,7 @@
             <a:r>
               <a:rPr sz="1200" b="0" i="0">
                 <a:solidFill>
-                  <a:srgbClr val="492713"/>
+                  <a:srgbClr val="8E8780"/>
                 </a:solidFill>
               </a:rPr>
               <a:t>사진 1</a:t>
@@ -5611,14 +5952,14 @@
       </p:sp>
       <p:sp>
         <p:nvSpPr>
-          <p:cNvPr id="6" name="사진 자리"/>
+          <p:cNvPr id="8" name="사진 자리"/>
           <p:cNvSpPr/>
           <p:nvPr/>
         </p:nvSpPr>
         <p:spPr>
           <a:xfrm>
-            <a:off x="4399178" y="1554480"/>
-            <a:ext cx="3393338" cy="2217420"/>
+            <a:off x="4338218" y="1783080"/>
+            <a:ext cx="3515258" cy="2103120"/>
           </a:xfrm>
           <a:prstGeom prst="roundRect">
             <a:avLst>
@@ -5626,12 +5967,10 @@
             </a:avLst>
           </a:prstGeom>
           <a:solidFill>
-            <a:srgbClr val="F4DBCD"/>
+            <a:srgbClr val="F6E1D5"/>
           </a:solidFill>
           <a:ln w="19050">
-            <a:solidFill>
-              <a:srgbClr val="995229"/>
-            </a:solidFill>
+            <a:noFill/>
             <a:prstDash val="dash"/>
           </a:ln>
         </p:spPr>
@@ -5649,7 +5988,7 @@
             <a:r>
               <a:rPr sz="1200" b="0" i="0">
                 <a:solidFill>
-                  <a:srgbClr val="492713"/>
+                  <a:srgbClr val="8E8780"/>
                 </a:solidFill>
               </a:rPr>
               <a:t>사진 2</a:t>
@@ -5659,14 +5998,14 @@
       </p:sp>
       <p:sp>
         <p:nvSpPr>
-          <p:cNvPr id="7" name="사진 자리"/>
+          <p:cNvPr id="9" name="사진 자리"/>
           <p:cNvSpPr/>
           <p:nvPr/>
         </p:nvSpPr>
         <p:spPr>
           <a:xfrm>
-            <a:off x="7975396" y="1554480"/>
-            <a:ext cx="3393338" cy="2217420"/>
+            <a:off x="8036356" y="1783080"/>
+            <a:ext cx="3515258" cy="2103120"/>
           </a:xfrm>
           <a:prstGeom prst="roundRect">
             <a:avLst>
@@ -5674,12 +6013,10 @@
             </a:avLst>
           </a:prstGeom>
           <a:solidFill>
-            <a:srgbClr val="F4DBCD"/>
+            <a:srgbClr val="F6E1D5"/>
           </a:solidFill>
           <a:ln w="19050">
-            <a:solidFill>
-              <a:srgbClr val="995229"/>
-            </a:solidFill>
+            <a:noFill/>
             <a:prstDash val="dash"/>
           </a:ln>
         </p:spPr>
@@ -5697,7 +6034,7 @@
             <a:r>
               <a:rPr sz="1200" b="0" i="0">
                 <a:solidFill>
-                  <a:srgbClr val="492713"/>
+                  <a:srgbClr val="8E8780"/>
                 </a:solidFill>
               </a:rPr>
               <a:t>사진 3</a:t>
@@ -5707,14 +6044,14 @@
       </p:sp>
       <p:sp>
         <p:nvSpPr>
-          <p:cNvPr id="8" name="사진 자리"/>
+          <p:cNvPr id="10" name="사진 자리"/>
           <p:cNvSpPr/>
           <p:nvPr/>
         </p:nvSpPr>
         <p:spPr>
           <a:xfrm>
-            <a:off x="822960" y="3954780"/>
-            <a:ext cx="3393338" cy="2217420"/>
+            <a:off x="640080" y="4069080"/>
+            <a:ext cx="3515258" cy="2103120"/>
           </a:xfrm>
           <a:prstGeom prst="roundRect">
             <a:avLst>
@@ -5722,12 +6059,10 @@
             </a:avLst>
           </a:prstGeom>
           <a:solidFill>
-            <a:srgbClr val="F4DBCD"/>
+            <a:srgbClr val="F6E1D5"/>
           </a:solidFill>
           <a:ln w="19050">
-            <a:solidFill>
-              <a:srgbClr val="995229"/>
-            </a:solidFill>
+            <a:noFill/>
             <a:prstDash val="dash"/>
           </a:ln>
         </p:spPr>
@@ -5745,7 +6080,7 @@
             <a:r>
               <a:rPr sz="1200" b="0" i="0">
                 <a:solidFill>
-                  <a:srgbClr val="492713"/>
+                  <a:srgbClr val="8E8780"/>
                 </a:solidFill>
               </a:rPr>
               <a:t>사진 4</a:t>
@@ -5755,14 +6090,14 @@
       </p:sp>
       <p:sp>
         <p:nvSpPr>
-          <p:cNvPr id="9" name="사진 자리"/>
+          <p:cNvPr id="11" name="사진 자리"/>
           <p:cNvSpPr/>
           <p:nvPr/>
         </p:nvSpPr>
         <p:spPr>
           <a:xfrm>
-            <a:off x="4399178" y="3954780"/>
-            <a:ext cx="3393338" cy="2217420"/>
+            <a:off x="4338218" y="4069080"/>
+            <a:ext cx="3515258" cy="2103120"/>
           </a:xfrm>
           <a:prstGeom prst="roundRect">
             <a:avLst>
@@ -5770,12 +6105,10 @@
             </a:avLst>
           </a:prstGeom>
           <a:solidFill>
-            <a:srgbClr val="F4DBCD"/>
+            <a:srgbClr val="F6E1D5"/>
           </a:solidFill>
           <a:ln w="19050">
-            <a:solidFill>
-              <a:srgbClr val="995229"/>
-            </a:solidFill>
+            <a:noFill/>
             <a:prstDash val="dash"/>
           </a:ln>
         </p:spPr>
@@ -5793,7 +6126,7 @@
             <a:r>
               <a:rPr sz="1200" b="0" i="0">
                 <a:solidFill>
-                  <a:srgbClr val="492713"/>
+                  <a:srgbClr val="8E8780"/>
                 </a:solidFill>
               </a:rPr>
               <a:t>사진 5</a:t>
@@ -5803,14 +6136,14 @@
       </p:sp>
       <p:sp>
         <p:nvSpPr>
-          <p:cNvPr id="10" name="사진 자리"/>
+          <p:cNvPr id="12" name="사진 자리"/>
           <p:cNvSpPr/>
           <p:nvPr/>
         </p:nvSpPr>
         <p:spPr>
           <a:xfrm>
-            <a:off x="7975396" y="3954780"/>
-            <a:ext cx="3393338" cy="2217420"/>
+            <a:off x="8036356" y="4069080"/>
+            <a:ext cx="3515258" cy="2103120"/>
           </a:xfrm>
           <a:prstGeom prst="roundRect">
             <a:avLst>
@@ -5818,12 +6151,10 @@
             </a:avLst>
           </a:prstGeom>
           <a:solidFill>
-            <a:srgbClr val="F4DBCD"/>
+            <a:srgbClr val="F6E1D5"/>
           </a:solidFill>
           <a:ln w="19050">
-            <a:solidFill>
-              <a:srgbClr val="995229"/>
-            </a:solidFill>
+            <a:noFill/>
             <a:prstDash val="dash"/>
           </a:ln>
         </p:spPr>
@@ -5841,7 +6172,7 @@
             <a:r>
               <a:rPr sz="1200" b="0" i="0">
                 <a:solidFill>
-                  <a:srgbClr val="492713"/>
+                  <a:srgbClr val="8E8780"/>
                 </a:solidFill>
               </a:rPr>
               <a:t>사진 6</a:t>
@@ -5860,6 +6191,14 @@
 <file path=ppt/slides/slide6.xml><?xml version="1.0" encoding="utf-8"?>
 <p:sld xmlns:a="http://schemas.openxmlformats.org/drawingml/2006/main" xmlns:p="http://schemas.openxmlformats.org/presentationml/2006/main" xmlns:r="http://schemas.openxmlformats.org/officeDocument/2006/relationships">
   <p:cSld>
+    <p:bg>
+      <p:bgPr>
+        <a:solidFill>
+          <a:srgbClr val="F6E1D5"/>
+        </a:solidFill>
+        <a:effectLst/>
+      </p:bgPr>
+    </p:bg>
     <p:spTree>
       <p:nvGrpSpPr>
         <p:cNvPr id="1" name=""/>
@@ -5867,30 +6206,116 @@
         <p:nvPr/>
       </p:nvGrpSpPr>
       <p:grpSpPr/>
-      <p:pic>
-        <p:nvPicPr>
-          <p:cNvPr id="3" name="표지 그림" descr="wedding-38.jpg"/>
-          <p:cNvPicPr>
-            <a:picLocks noChangeAspect="1"/>
-          </p:cNvPicPr>
+      <p:sp>
+        <p:nvSpPr>
+          <p:cNvPr id="3" name="사진 자리"/>
+          <p:cNvSpPr/>
           <p:nvPr/>
-        </p:nvPicPr>
-        <p:blipFill>
-          <a:blip r:embed="rId2"/>
-          <a:stretch>
-            <a:fillRect/>
-          </a:stretch>
-        </p:blipFill>
-        <p:spPr>
-          <a:xfrm>
-            <a:off x="0" y="0"/>
-            <a:ext cx="12191695" cy="6858000"/>
+        </p:nvSpPr>
+        <p:spPr>
+          <a:xfrm>
+            <a:off x="7802684" y="0"/>
+            <a:ext cx="4389010" cy="6858000"/>
           </a:xfrm>
           <a:prstGeom prst="rect">
             <a:avLst/>
           </a:prstGeom>
-        </p:spPr>
-      </p:pic>
+          <a:solidFill>
+            <a:srgbClr val="EBC4AD"/>
+          </a:solidFill>
+          <a:ln>
+            <a:noFill/>
+          </a:ln>
+        </p:spPr>
+        <p:txBody>
+          <a:bodyPr rtlCol="0" anchor="ctr" wrap="square" lIns="54864" rIns="54864" tIns="27432" bIns="27432">
+            <a:noAutofit/>
+          </a:bodyPr>
+          <a:lstStyle/>
+          <a:p>
+            <a:pPr algn="ctr">
+              <a:lnSpc>
+                <a:spcPct val="100000"/>
+              </a:lnSpc>
+            </a:pPr>
+            <a:r>
+              <a:rPr sz="1400" b="0" i="0">
+                <a:solidFill>
+                  <a:srgbClr val="493427"/>
+                </a:solidFill>
+              </a:rPr>
+              <a:t>사진을 넣어 주세요</a:t>
+            </a:r>
+          </a:p>
+        </p:txBody>
+      </p:sp>
+      <p:sp>
+        <p:nvSpPr>
+          <p:cNvPr id="4" name="장식"/>
+          <p:cNvSpPr/>
+          <p:nvPr/>
+        </p:nvSpPr>
+        <p:spPr>
+          <a:xfrm>
+            <a:off x="8168435" y="365760"/>
+            <a:ext cx="3657508" cy="6126480"/>
+          </a:xfrm>
+          <a:prstGeom prst="rect">
+            <a:avLst/>
+          </a:prstGeom>
+          <a:noFill/>
+          <a:ln w="9525">
+            <a:solidFill>
+              <a:srgbClr val="26231F"/>
+            </a:solidFill>
+          </a:ln>
+        </p:spPr>
+        <p:txBody>
+          <a:bodyPr rtlCol="0" anchor="ctr"/>
+          <a:lstStyle/>
+          <a:p>
+            <a:pPr algn="ctr"/>
+          </a:p>
+        </p:txBody>
+      </p:sp>
+      <p:sp>
+        <p:nvSpPr>
+          <p:cNvPr id="5" name="라벨"/>
+          <p:cNvSpPr txBox="1"/>
+          <p:nvPr/>
+        </p:nvSpPr>
+        <p:spPr>
+          <a:xfrm>
+            <a:off x="822960" y="2148840"/>
+            <a:ext cx="5608179" cy="274320"/>
+          </a:xfrm>
+          <a:prstGeom prst="rect">
+            <a:avLst/>
+          </a:prstGeom>
+          <a:noFill/>
+        </p:spPr>
+        <p:txBody>
+          <a:bodyPr wrap="square" lIns="54864" rIns="54864" tIns="27432" bIns="27432" anchor="t">
+            <a:noAutofit/>
+          </a:bodyPr>
+          <a:lstStyle/>
+          <a:p>
+            <a:pPr algn="l">
+              <a:lnSpc>
+                <a:spcPct val="115000"/>
+              </a:lnSpc>
+            </a:pPr>
+            <a:r>
+              <a:rPr sz="1000" b="1" i="0" spc="250">
+                <a:solidFill>
+                  <a:srgbClr val="26231F"/>
+                </a:solidFill>
+              </a:rPr>
+              <a:t>WEDDING</a:t>
+            </a:r>
+          </a:p>
+        </p:txBody>
+      </p:sp>
       <p:sp>
         <p:nvSpPr>
           <p:cNvPr id="2" name="Title 1"/>
@@ -5903,8 +6328,8 @@
         </p:nvSpPr>
         <p:spPr>
           <a:xfrm>
-            <a:off x="853418" y="2057400"/>
-            <a:ext cx="6095847" cy="1554480"/>
+            <a:off x="822960" y="2606040"/>
+            <a:ext cx="5608179" cy="1188720"/>
           </a:xfrm>
         </p:spPr>
         <p:txBody>
@@ -5921,7 +6346,7 @@
             <a:r>
               <a:rPr sz="3400" b="1" i="0">
                 <a:solidFill>
-                  <a:srgbClr val="492713"/>
+                  <a:srgbClr val="26231F"/>
                 </a:solidFill>
               </a:rPr>
               <a:t>와 주셔서 고맙습니다</a:t>
@@ -5931,14 +6356,14 @@
       </p:sp>
       <p:sp>
         <p:nvSpPr>
-          <p:cNvPr id="4" name="한 줄 문구"/>
+          <p:cNvPr id="6" name="한 줄 문구"/>
           <p:cNvSpPr txBox="1"/>
           <p:nvPr/>
         </p:nvSpPr>
         <p:spPr>
           <a:xfrm>
-            <a:off x="853418" y="3749039"/>
-            <a:ext cx="6095847" cy="822960"/>
+            <a:off x="822960" y="3886200"/>
+            <a:ext cx="5608179" cy="822960"/>
           </a:xfrm>
           <a:prstGeom prst="rect">
             <a:avLst/>
@@ -5957,9 +6382,9 @@
               </a:lnSpc>
             </a:pPr>
             <a:r>
-              <a:rPr sz="1700" b="0" i="1">
+              <a:rPr sz="1700" b="0" i="0">
                 <a:solidFill>
-                  <a:srgbClr val="492713"/>
+                  <a:srgbClr val="26231F"/>
                 </a:solidFill>
               </a:rPr>
               <a:t>잘 살겠습니다</a:t>
@@ -5969,14 +6394,14 @@
       </p:sp>
       <p:sp>
         <p:nvSpPr>
-          <p:cNvPr id="5" name="안내 문구"/>
+          <p:cNvPr id="7" name="안내 문구"/>
           <p:cNvSpPr txBox="1"/>
           <p:nvPr/>
         </p:nvSpPr>
         <p:spPr>
           <a:xfrm>
-            <a:off x="853418" y="4617720"/>
-            <a:ext cx="6095847" cy="914400"/>
+            <a:off x="822960" y="4754880"/>
+            <a:ext cx="5608179" cy="914400"/>
           </a:xfrm>
           <a:prstGeom prst="rect">
             <a:avLst/>
@@ -5997,7 +6422,7 @@
             <a:r>
               <a:rPr sz="1400" b="0" i="0">
                 <a:solidFill>
-                  <a:srgbClr val="666666"/>
+                  <a:srgbClr val="26231F"/>
                 </a:solidFill>
               </a:rPr>
               <a:t>신랑 이름 ♥ 신부 이름</a:t>
@@ -6024,34 +6449,34 @@
         <a:sysClr val="window" lastClr="FFFFFF"/>
       </a:lt1>
       <a:dk2>
-        <a:srgbClr val="492713"/>
+        <a:srgbClr val="493427"/>
       </a:dk2>
       <a:lt2>
-        <a:srgbClr val="FBF3EF"/>
+        <a:srgbClr val="FBF2EC"/>
       </a:lt2>
       <a:accent1>
-        <a:srgbClr val="995229"/>
+        <a:srgbClr val="D89C79"/>
       </a:accent1>
       <a:accent2>
-        <a:srgbClr val="3B9185"/>
+        <a:srgbClr val="E1D598"/>
       </a:accent2>
       <a:accent3>
-        <a:srgbClr val="492713"/>
+        <a:srgbClr val="493427"/>
       </a:accent3>
       <a:accent4>
-        <a:srgbClr val="F4DBCD"/>
+        <a:srgbClr val="F6E1D5"/>
       </a:accent4>
       <a:accent5>
-        <a:srgbClr val="6A7257"/>
+        <a:srgbClr val="DCB888"/>
       </a:accent5>
       <a:accent6>
-        <a:srgbClr val="927D71"/>
+        <a:srgbClr val="92857D"/>
       </a:accent6>
       <a:hlink>
-        <a:srgbClr val="995229"/>
+        <a:srgbClr val="D89C79"/>
       </a:hlink>
       <a:folHlink>
-        <a:srgbClr val="492713"/>
+        <a:srgbClr val="493427"/>
       </a:folHlink>
     </a:clrScheme>
     <a:fontScheme name="Office">
